--- a/08-donor-coordination/slides.pptx
+++ b/08-donor-coordination/slides.pptx
@@ -8487,7 +8487,7 @@
           <a:p>
             <a:fld id="{C8988C57-2E59-421E-A4AA-10CA8DC6C83D}" type="datetimeFigureOut">
               <a:rPr lang="en-IL" smtClean="0"/>
-              <a:t>06/08/2025</a:t>
+              <a:t>12/15/2025</a:t>
             </a:fld>
             <a:endParaRPr lang="en-IL"/>
           </a:p>
@@ -8686,7 +8686,7 @@
           <a:p>
             <a:fld id="{C8988C57-2E59-421E-A4AA-10CA8DC6C83D}" type="datetimeFigureOut">
               <a:rPr lang="en-IL" smtClean="0"/>
-              <a:t>06/08/2025</a:t>
+              <a:t>12/15/2025</a:t>
             </a:fld>
             <a:endParaRPr lang="en-IL"/>
           </a:p>
@@ -8961,7 +8961,7 @@
           <a:p>
             <a:fld id="{C8988C57-2E59-421E-A4AA-10CA8DC6C83D}" type="datetimeFigureOut">
               <a:rPr lang="en-IL" smtClean="0"/>
-              <a:t>06/08/2025</a:t>
+              <a:t>12/15/2025</a:t>
             </a:fld>
             <a:endParaRPr lang="en-IL"/>
           </a:p>
@@ -9228,7 +9228,7 @@
           <a:p>
             <a:fld id="{C8988C57-2E59-421E-A4AA-10CA8DC6C83D}" type="datetimeFigureOut">
               <a:rPr lang="en-IL" smtClean="0"/>
-              <a:t>06/08/2025</a:t>
+              <a:t>12/15/2025</a:t>
             </a:fld>
             <a:endParaRPr lang="en-IL"/>
           </a:p>
@@ -9642,7 +9642,7 @@
           <a:p>
             <a:fld id="{C8988C57-2E59-421E-A4AA-10CA8DC6C83D}" type="datetimeFigureOut">
               <a:rPr lang="en-IL" smtClean="0"/>
-              <a:t>06/08/2025</a:t>
+              <a:t>12/15/2025</a:t>
             </a:fld>
             <a:endParaRPr lang="en-IL"/>
           </a:p>
@@ -9783,7 +9783,7 @@
           <a:p>
             <a:fld id="{C8988C57-2E59-421E-A4AA-10CA8DC6C83D}" type="datetimeFigureOut">
               <a:rPr lang="en-IL" smtClean="0"/>
-              <a:t>06/08/2025</a:t>
+              <a:t>12/15/2025</a:t>
             </a:fld>
             <a:endParaRPr lang="en-IL"/>
           </a:p>
@@ -10158,7 +10158,7 @@
           <a:p>
             <a:fld id="{C8988C57-2E59-421E-A4AA-10CA8DC6C83D}" type="datetimeFigureOut">
               <a:rPr lang="en-IL" smtClean="0"/>
-              <a:t>06/08/2025</a:t>
+              <a:t>12/15/2025</a:t>
             </a:fld>
             <a:endParaRPr lang="en-IL"/>
           </a:p>
@@ -10470,7 +10470,7 @@
           <a:p>
             <a:fld id="{C8988C57-2E59-421E-A4AA-10CA8DC6C83D}" type="datetimeFigureOut">
               <a:rPr lang="en-IL" smtClean="0"/>
-              <a:t>06/08/2025</a:t>
+              <a:t>12/15/2025</a:t>
             </a:fld>
             <a:endParaRPr lang="en-IL"/>
           </a:p>
@@ -10758,7 +10758,7 @@
           <a:p>
             <a:fld id="{C8988C57-2E59-421E-A4AA-10CA8DC6C83D}" type="datetimeFigureOut">
               <a:rPr lang="en-IL" smtClean="0"/>
-              <a:t>06/08/2025</a:t>
+              <a:t>12/15/2025</a:t>
             </a:fld>
             <a:endParaRPr lang="en-IL"/>
           </a:p>
@@ -10957,7 +10957,7 @@
           <a:p>
             <a:fld id="{C8988C57-2E59-421E-A4AA-10CA8DC6C83D}" type="datetimeFigureOut">
               <a:rPr lang="en-IL" smtClean="0"/>
-              <a:t>06/08/2025</a:t>
+              <a:t>12/15/2025</a:t>
             </a:fld>
             <a:endParaRPr lang="en-IL"/>
           </a:p>
@@ -11166,7 +11166,7 @@
           <a:p>
             <a:fld id="{C8988C57-2E59-421E-A4AA-10CA8DC6C83D}" type="datetimeFigureOut">
               <a:rPr lang="en-IL" smtClean="0"/>
-              <a:t>06/08/2025</a:t>
+              <a:t>12/15/2025</a:t>
             </a:fld>
             <a:endParaRPr lang="en-IL"/>
           </a:p>
@@ -16379,7 +16379,7 @@
           <a:p>
             <a:fld id="{C8988C57-2E59-421E-A4AA-10CA8DC6C83D}" type="datetimeFigureOut">
               <a:rPr lang="en-IL" smtClean="0"/>
-              <a:t>06/08/2025</a:t>
+              <a:t>12/15/2025</a:t>
             </a:fld>
             <a:endParaRPr lang="en-IL"/>
           </a:p>
@@ -18011,9 +18011,9 @@
                 <a:ln>
                   <a:noFill/>
                 </a:ln>
-                <a:latin typeface="Liberation Sans" pitchFamily="34"/>
+                <a:latin typeface="Times New Roman" panose="02020603050405020304" pitchFamily="18" charset="0"/>
                 <a:ea typeface="David CLM" pitchFamily="2"/>
-                <a:cs typeface="Liberation Sans" pitchFamily="34"/>
+                <a:cs typeface="Times New Roman" panose="02020603050405020304" pitchFamily="18" charset="0"/>
               </a:rPr>
               <a:t>max[d]  product[i]  u</a:t>
             </a:r>
@@ -18022,9 +18022,9 @@
                 <a:ln>
                   <a:noFill/>
                 </a:ln>
-                <a:latin typeface="Liberation Sans" pitchFamily="34"/>
+                <a:latin typeface="Times New Roman" panose="02020603050405020304" pitchFamily="18" charset="0"/>
                 <a:ea typeface="David CLM" pitchFamily="2"/>
-                <a:cs typeface="Liberation Sans" pitchFamily="34"/>
+                <a:cs typeface="Times New Roman" panose="02020603050405020304" pitchFamily="18" charset="0"/>
               </a:rPr>
               <a:t>i</a:t>
             </a:r>
@@ -18033,9 +18033,9 @@
                 <a:ln>
                   <a:noFill/>
                 </a:ln>
-                <a:latin typeface="Liberation Sans" pitchFamily="34"/>
+                <a:latin typeface="Times New Roman" panose="02020603050405020304" pitchFamily="18" charset="0"/>
                 <a:ea typeface="David CLM" pitchFamily="2"/>
-                <a:cs typeface="Liberation Sans" pitchFamily="34"/>
+                <a:cs typeface="Times New Roman" panose="02020603050405020304" pitchFamily="18" charset="0"/>
               </a:rPr>
               <a:t>(d).</a:t>
             </a:r>
@@ -18122,9 +18122,9 @@
                 <a:solidFill>
                   <a:srgbClr val="9933FF"/>
                 </a:solidFill>
-                <a:latin typeface="Liberation Sans" pitchFamily="34"/>
+                <a:latin typeface="Times New Roman" panose="02020603050405020304" pitchFamily="18" charset="0"/>
                 <a:ea typeface="David CLM" pitchFamily="2"/>
-                <a:cs typeface="Liberation Sans" pitchFamily="34"/>
+                <a:cs typeface="Times New Roman" panose="02020603050405020304" pitchFamily="18" charset="0"/>
               </a:rPr>
               <a:t>max[d] sum[i] log(u</a:t>
             </a:r>
@@ -18136,9 +18136,9 @@
                 <a:solidFill>
                   <a:srgbClr val="9933FF"/>
                 </a:solidFill>
-                <a:latin typeface="Liberation Sans" pitchFamily="34"/>
+                <a:latin typeface="Times New Roman" panose="02020603050405020304" pitchFamily="18" charset="0"/>
                 <a:ea typeface="David CLM" pitchFamily="2"/>
-                <a:cs typeface="Liberation Sans" pitchFamily="34"/>
+                <a:cs typeface="Times New Roman" panose="02020603050405020304" pitchFamily="18" charset="0"/>
               </a:rPr>
               <a:t>i</a:t>
             </a:r>
@@ -18150,9 +18150,9 @@
                 <a:solidFill>
                   <a:srgbClr val="9933FF"/>
                 </a:solidFill>
-                <a:latin typeface="Liberation Sans" pitchFamily="34"/>
+                <a:latin typeface="Times New Roman" panose="02020603050405020304" pitchFamily="18" charset="0"/>
                 <a:ea typeface="David CLM" pitchFamily="2"/>
-                <a:cs typeface="Liberation Sans" pitchFamily="34"/>
+                <a:cs typeface="Times New Roman" panose="02020603050405020304" pitchFamily="18" charset="0"/>
               </a:rPr>
               <a:t>(d))</a:t>
             </a:r>
@@ -19063,9 +19063,9 @@
                 <a:ln>
                   <a:noFill/>
                 </a:ln>
-                <a:latin typeface="Liberation Sans" pitchFamily="34"/>
-                <a:ea typeface="Noto Sans CJK SC Regular" pitchFamily="2"/>
-                <a:cs typeface="Liberation Sans" pitchFamily="34"/>
+                <a:latin typeface="Times New Roman" panose="02020603050405020304" pitchFamily="18" charset="0"/>
+                <a:ea typeface="Noto Sans CJK SC Regular" pitchFamily="2"/>
+                <a:cs typeface="Times New Roman" panose="02020603050405020304" pitchFamily="18" charset="0"/>
               </a:rPr>
               <a:t>d</a:t>
             </a:r>
@@ -19122,11 +19122,11 @@
                 <a:ln>
                   <a:noFill/>
                 </a:ln>
-                <a:latin typeface="Liberation Sans" pitchFamily="34"/>
-                <a:ea typeface="Noto Sans CJK SC Regular" pitchFamily="2"/>
-                <a:cs typeface="Liberation Sans" pitchFamily="34"/>
-              </a:rPr>
-              <a:t>'d</a:t>
+                <a:latin typeface="Times New Roman" panose="02020603050405020304" pitchFamily="18" charset="0"/>
+                <a:ea typeface="Noto Sans CJK SC Regular" pitchFamily="2"/>
+                <a:cs typeface="Times New Roman" panose="02020603050405020304" pitchFamily="18" charset="0"/>
+              </a:rPr>
+              <a:t>d’</a:t>
             </a:r>
             <a:r>
               <a:rPr lang="he-IL" sz="3600" b="0" i="0" u="none" strike="noStrike" kern="1200" cap="none">
@@ -19155,9 +19155,9 @@
                 <a:ln>
                   <a:noFill/>
                 </a:ln>
-                <a:latin typeface="Liberation Sans" pitchFamily="34"/>
-                <a:ea typeface="Noto Sans CJK SC Regular" pitchFamily="2"/>
-                <a:cs typeface="Liberation Sans" pitchFamily="34"/>
+                <a:latin typeface="Times New Roman" panose="02020603050405020304" pitchFamily="18" charset="0"/>
+                <a:ea typeface="Noto Sans CJK SC Regular" pitchFamily="2"/>
+                <a:cs typeface="Times New Roman" panose="02020603050405020304" pitchFamily="18" charset="0"/>
               </a:rPr>
               <a:t>e</a:t>
             </a:r>
@@ -19240,9 +19240,9 @@
                 <a:ln>
                   <a:noFill/>
                 </a:ln>
-                <a:latin typeface="Liberation Sans" pitchFamily="34"/>
-                <a:ea typeface="Noto Sans CJK SC Regular" pitchFamily="2"/>
-                <a:cs typeface="Liberation Sans" pitchFamily="34"/>
+                <a:latin typeface="Times New Roman" panose="02020603050405020304" pitchFamily="18" charset="0"/>
+                <a:ea typeface="Noto Sans CJK SC Regular" pitchFamily="2"/>
+                <a:cs typeface="Times New Roman" panose="02020603050405020304" pitchFamily="18" charset="0"/>
               </a:rPr>
               <a:t>i</a:t>
             </a:r>
@@ -19291,9 +19291,9 @@
                 <a:solidFill>
                   <a:srgbClr val="0066FF"/>
                 </a:solidFill>
-                <a:latin typeface="Liberation Sans" pitchFamily="34"/>
-                <a:ea typeface="Noto Sans CJK SC Regular" pitchFamily="2"/>
-                <a:cs typeface="Liberation Sans" pitchFamily="34"/>
+                <a:latin typeface="Times New Roman" panose="02020603050405020304" pitchFamily="18" charset="0"/>
+                <a:ea typeface="Noto Sans CJK SC Regular" pitchFamily="2"/>
+                <a:cs typeface="Times New Roman" panose="02020603050405020304" pitchFamily="18" charset="0"/>
               </a:rPr>
               <a:t>u</a:t>
             </a:r>
@@ -19305,9 +19305,9 @@
                 <a:solidFill>
                   <a:srgbClr val="0066FF"/>
                 </a:solidFill>
-                <a:latin typeface="Liberation Sans" pitchFamily="34"/>
-                <a:ea typeface="Noto Sans CJK SC Regular" pitchFamily="2"/>
-                <a:cs typeface="Liberation Sans" pitchFamily="34"/>
+                <a:latin typeface="Times New Roman" panose="02020603050405020304" pitchFamily="18" charset="0"/>
+                <a:ea typeface="Noto Sans CJK SC Regular" pitchFamily="2"/>
+                <a:cs typeface="Times New Roman" panose="02020603050405020304" pitchFamily="18" charset="0"/>
               </a:rPr>
               <a:t>i</a:t>
             </a:r>
@@ -19319,9 +19319,9 @@
                 <a:solidFill>
                   <a:srgbClr val="0066FF"/>
                 </a:solidFill>
-                <a:latin typeface="Liberation Sans" pitchFamily="34"/>
-                <a:ea typeface="Noto Sans CJK SC Regular" pitchFamily="2"/>
-                <a:cs typeface="Liberation Sans" pitchFamily="34"/>
+                <a:latin typeface="Times New Roman" panose="02020603050405020304" pitchFamily="18" charset="0"/>
+                <a:ea typeface="Noto Sans CJK SC Regular" pitchFamily="2"/>
+                <a:cs typeface="Times New Roman" panose="02020603050405020304" pitchFamily="18" charset="0"/>
               </a:rPr>
               <a:t>(d')–u</a:t>
             </a:r>
@@ -19333,9 +19333,9 @@
                 <a:solidFill>
                   <a:srgbClr val="0066FF"/>
                 </a:solidFill>
-                <a:latin typeface="Liberation Sans" pitchFamily="34"/>
-                <a:ea typeface="Noto Sans CJK SC Regular" pitchFamily="2"/>
-                <a:cs typeface="Liberation Sans" pitchFamily="34"/>
+                <a:latin typeface="Times New Roman" panose="02020603050405020304" pitchFamily="18" charset="0"/>
+                <a:ea typeface="Noto Sans CJK SC Regular" pitchFamily="2"/>
+                <a:cs typeface="Times New Roman" panose="02020603050405020304" pitchFamily="18" charset="0"/>
               </a:rPr>
               <a:t>i</a:t>
             </a:r>
@@ -19347,9 +19347,9 @@
                 <a:solidFill>
                   <a:srgbClr val="0066FF"/>
                 </a:solidFill>
-                <a:latin typeface="Liberation Sans" pitchFamily="34"/>
-                <a:ea typeface="Noto Sans CJK SC Regular" pitchFamily="2"/>
-                <a:cs typeface="Liberation Sans" pitchFamily="34"/>
+                <a:latin typeface="Times New Roman" panose="02020603050405020304" pitchFamily="18" charset="0"/>
+                <a:ea typeface="Noto Sans CJK SC Regular" pitchFamily="2"/>
+                <a:cs typeface="Times New Roman" panose="02020603050405020304" pitchFamily="18" charset="0"/>
               </a:rPr>
               <a:t>(d) = e*(u</a:t>
             </a:r>
@@ -19361,9 +19361,9 @@
                 <a:solidFill>
                   <a:srgbClr val="0066FF"/>
                 </a:solidFill>
-                <a:latin typeface="Liberation Sans" pitchFamily="34"/>
-                <a:ea typeface="Noto Sans CJK SC Regular" pitchFamily="2"/>
-                <a:cs typeface="Liberation Sans" pitchFamily="34"/>
+                <a:latin typeface="Times New Roman" panose="02020603050405020304" pitchFamily="18" charset="0"/>
+                <a:ea typeface="Noto Sans CJK SC Regular" pitchFamily="2"/>
+                <a:cs typeface="Times New Roman" panose="02020603050405020304" pitchFamily="18" charset="0"/>
               </a:rPr>
               <a:t>i,2</a:t>
             </a:r>
@@ -19375,9 +19375,9 @@
                 <a:solidFill>
                   <a:srgbClr val="0066FF"/>
                 </a:solidFill>
-                <a:latin typeface="Liberation Sans" pitchFamily="34"/>
-                <a:ea typeface="Noto Sans CJK SC Regular" pitchFamily="2"/>
-                <a:cs typeface="Liberation Sans" pitchFamily="34"/>
+                <a:latin typeface="Times New Roman" panose="02020603050405020304" pitchFamily="18" charset="0"/>
+                <a:ea typeface="Noto Sans CJK SC Regular" pitchFamily="2"/>
+                <a:cs typeface="Times New Roman" panose="02020603050405020304" pitchFamily="18" charset="0"/>
               </a:rPr>
               <a:t>-u</a:t>
             </a:r>
@@ -19389,9 +19389,9 @@
                 <a:solidFill>
                   <a:srgbClr val="0066FF"/>
                 </a:solidFill>
-                <a:latin typeface="Liberation Sans" pitchFamily="34"/>
-                <a:ea typeface="Noto Sans CJK SC Regular" pitchFamily="2"/>
-                <a:cs typeface="Liberation Sans" pitchFamily="34"/>
+                <a:latin typeface="Times New Roman" panose="02020603050405020304" pitchFamily="18" charset="0"/>
+                <a:ea typeface="Noto Sans CJK SC Regular" pitchFamily="2"/>
+                <a:cs typeface="Times New Roman" panose="02020603050405020304" pitchFamily="18" charset="0"/>
               </a:rPr>
               <a:t>i,1</a:t>
             </a:r>
@@ -19403,9 +19403,9 @@
                 <a:solidFill>
                   <a:srgbClr val="0066FF"/>
                 </a:solidFill>
-                <a:latin typeface="Liberation Sans" pitchFamily="34"/>
-                <a:ea typeface="Noto Sans CJK SC Regular" pitchFamily="2"/>
-                <a:cs typeface="Liberation Sans" pitchFamily="34"/>
+                <a:latin typeface="Times New Roman" panose="02020603050405020304" pitchFamily="18" charset="0"/>
+                <a:ea typeface="Noto Sans CJK SC Regular" pitchFamily="2"/>
+                <a:cs typeface="Times New Roman" panose="02020603050405020304" pitchFamily="18" charset="0"/>
               </a:rPr>
               <a:t>)</a:t>
             </a:r>
@@ -19491,9 +19491,9 @@
                 <a:solidFill>
                   <a:srgbClr val="0066FF"/>
                 </a:solidFill>
-                <a:latin typeface="Liberation Sans" pitchFamily="34"/>
-                <a:ea typeface="Noto Sans CJK SC Regular" pitchFamily="2"/>
-                <a:cs typeface="Liberation Sans" pitchFamily="34"/>
+                <a:latin typeface="Times New Roman" panose="02020603050405020304" pitchFamily="18" charset="0"/>
+                <a:ea typeface="Noto Sans CJK SC Regular" pitchFamily="2"/>
+                <a:cs typeface="Times New Roman" panose="02020603050405020304" pitchFamily="18" charset="0"/>
               </a:rPr>
               <a:t>f(u</a:t>
             </a:r>
@@ -19505,9 +19505,9 @@
                 <a:solidFill>
                   <a:srgbClr val="0066FF"/>
                 </a:solidFill>
-                <a:latin typeface="Liberation Sans" pitchFamily="34"/>
-                <a:ea typeface="Noto Sans CJK SC Regular" pitchFamily="2"/>
-                <a:cs typeface="Liberation Sans" pitchFamily="34"/>
+                <a:latin typeface="Times New Roman" panose="02020603050405020304" pitchFamily="18" charset="0"/>
+                <a:ea typeface="Noto Sans CJK SC Regular" pitchFamily="2"/>
+                <a:cs typeface="Times New Roman" panose="02020603050405020304" pitchFamily="18" charset="0"/>
               </a:rPr>
               <a:t>i</a:t>
             </a:r>
@@ -19519,9 +19519,9 @@
                 <a:solidFill>
                   <a:srgbClr val="0066FF"/>
                 </a:solidFill>
-                <a:latin typeface="Liberation Sans" pitchFamily="34"/>
-                <a:ea typeface="Noto Sans CJK SC Regular" pitchFamily="2"/>
-                <a:cs typeface="Liberation Sans" pitchFamily="34"/>
+                <a:latin typeface="Times New Roman" panose="02020603050405020304" pitchFamily="18" charset="0"/>
+                <a:ea typeface="Noto Sans CJK SC Regular" pitchFamily="2"/>
+                <a:cs typeface="Times New Roman" panose="02020603050405020304" pitchFamily="18" charset="0"/>
               </a:rPr>
               <a:t>(d'))–f(u</a:t>
             </a:r>
@@ -19533,9 +19533,9 @@
                 <a:solidFill>
                   <a:srgbClr val="0066FF"/>
                 </a:solidFill>
-                <a:latin typeface="Liberation Sans" pitchFamily="34"/>
-                <a:ea typeface="Noto Sans CJK SC Regular" pitchFamily="2"/>
-                <a:cs typeface="Liberation Sans" pitchFamily="34"/>
+                <a:latin typeface="Times New Roman" panose="02020603050405020304" pitchFamily="18" charset="0"/>
+                <a:ea typeface="Noto Sans CJK SC Regular" pitchFamily="2"/>
+                <a:cs typeface="Times New Roman" panose="02020603050405020304" pitchFamily="18" charset="0"/>
               </a:rPr>
               <a:t>i</a:t>
             </a:r>
@@ -19547,9 +19547,9 @@
                 <a:solidFill>
                   <a:srgbClr val="0066FF"/>
                 </a:solidFill>
-                <a:latin typeface="Liberation Sans" pitchFamily="34"/>
-                <a:ea typeface="Noto Sans CJK SC Regular" pitchFamily="2"/>
-                <a:cs typeface="Liberation Sans" pitchFamily="34"/>
+                <a:latin typeface="Times New Roman" panose="02020603050405020304" pitchFamily="18" charset="0"/>
+                <a:ea typeface="Noto Sans CJK SC Regular" pitchFamily="2"/>
+                <a:cs typeface="Times New Roman" panose="02020603050405020304" pitchFamily="18" charset="0"/>
               </a:rPr>
               <a:t>(d))  =~  e*(u</a:t>
             </a:r>
@@ -19561,9 +19561,9 @@
                 <a:solidFill>
                   <a:srgbClr val="0066FF"/>
                 </a:solidFill>
-                <a:latin typeface="Liberation Sans" pitchFamily="34"/>
-                <a:ea typeface="Noto Sans CJK SC Regular" pitchFamily="2"/>
-                <a:cs typeface="Liberation Sans" pitchFamily="34"/>
+                <a:latin typeface="Times New Roman" panose="02020603050405020304" pitchFamily="18" charset="0"/>
+                <a:ea typeface="Noto Sans CJK SC Regular" pitchFamily="2"/>
+                <a:cs typeface="Times New Roman" panose="02020603050405020304" pitchFamily="18" charset="0"/>
               </a:rPr>
               <a:t>i,2</a:t>
             </a:r>
@@ -19575,9 +19575,9 @@
                 <a:solidFill>
                   <a:srgbClr val="0066FF"/>
                 </a:solidFill>
-                <a:latin typeface="Liberation Sans" pitchFamily="34"/>
-                <a:ea typeface="Noto Sans CJK SC Regular" pitchFamily="2"/>
-                <a:cs typeface="Liberation Sans" pitchFamily="34"/>
+                <a:latin typeface="Times New Roman" panose="02020603050405020304" pitchFamily="18" charset="0"/>
+                <a:ea typeface="Noto Sans CJK SC Regular" pitchFamily="2"/>
+                <a:cs typeface="Times New Roman" panose="02020603050405020304" pitchFamily="18" charset="0"/>
               </a:rPr>
               <a:t>-u</a:t>
             </a:r>
@@ -19589,9 +19589,9 @@
                 <a:solidFill>
                   <a:srgbClr val="0066FF"/>
                 </a:solidFill>
-                <a:latin typeface="Liberation Sans" pitchFamily="34"/>
-                <a:ea typeface="Noto Sans CJK SC Regular" pitchFamily="2"/>
-                <a:cs typeface="Liberation Sans" pitchFamily="34"/>
+                <a:latin typeface="Times New Roman" panose="02020603050405020304" pitchFamily="18" charset="0"/>
+                <a:ea typeface="Noto Sans CJK SC Regular" pitchFamily="2"/>
+                <a:cs typeface="Times New Roman" panose="02020603050405020304" pitchFamily="18" charset="0"/>
               </a:rPr>
               <a:t>i,1</a:t>
             </a:r>
@@ -19603,9 +19603,9 @@
                 <a:solidFill>
                   <a:srgbClr val="0066FF"/>
                 </a:solidFill>
-                <a:latin typeface="Liberation Sans" pitchFamily="34"/>
-                <a:ea typeface="Noto Sans CJK SC Regular" pitchFamily="2"/>
-                <a:cs typeface="Liberation Sans" pitchFamily="34"/>
+                <a:latin typeface="Times New Roman" panose="02020603050405020304" pitchFamily="18" charset="0"/>
+                <a:ea typeface="Noto Sans CJK SC Regular" pitchFamily="2"/>
+                <a:cs typeface="Times New Roman" panose="02020603050405020304" pitchFamily="18" charset="0"/>
               </a:rPr>
               <a:t>) * f'(u</a:t>
             </a:r>
@@ -19617,9 +19617,9 @@
                 <a:solidFill>
                   <a:srgbClr val="0066FF"/>
                 </a:solidFill>
-                <a:latin typeface="Liberation Sans" pitchFamily="34"/>
-                <a:ea typeface="Noto Sans CJK SC Regular" pitchFamily="2"/>
-                <a:cs typeface="Liberation Sans" pitchFamily="34"/>
+                <a:latin typeface="Times New Roman" panose="02020603050405020304" pitchFamily="18" charset="0"/>
+                <a:ea typeface="Noto Sans CJK SC Regular" pitchFamily="2"/>
+                <a:cs typeface="Times New Roman" panose="02020603050405020304" pitchFamily="18" charset="0"/>
               </a:rPr>
               <a:t>i</a:t>
             </a:r>
@@ -19631,9 +19631,9 @@
                 <a:solidFill>
                   <a:srgbClr val="0066FF"/>
                 </a:solidFill>
-                <a:latin typeface="Liberation Sans" pitchFamily="34"/>
-                <a:ea typeface="Noto Sans CJK SC Regular" pitchFamily="2"/>
-                <a:cs typeface="Liberation Sans" pitchFamily="34"/>
+                <a:latin typeface="Times New Roman" panose="02020603050405020304" pitchFamily="18" charset="0"/>
+                <a:ea typeface="Noto Sans CJK SC Regular" pitchFamily="2"/>
+                <a:cs typeface="Times New Roman" panose="02020603050405020304" pitchFamily="18" charset="0"/>
               </a:rPr>
               <a:t>(d))</a:t>
             </a:r>
@@ -19716,9 +19716,9 @@
                 <a:solidFill>
                   <a:srgbClr val="0066FF"/>
                 </a:solidFill>
-                <a:latin typeface="Liberation Sans" pitchFamily="34"/>
-                <a:ea typeface="Noto Sans CJK SC Regular" pitchFamily="2"/>
-                <a:cs typeface="Liberation Sans" pitchFamily="34"/>
+                <a:latin typeface="Times New Roman" panose="02020603050405020304" pitchFamily="18" charset="0"/>
+                <a:ea typeface="Noto Sans CJK SC Regular" pitchFamily="2"/>
+                <a:cs typeface="Times New Roman" panose="02020603050405020304" pitchFamily="18" charset="0"/>
               </a:rPr>
               <a:t>log(u</a:t>
             </a:r>
@@ -19730,9 +19730,9 @@
                 <a:solidFill>
                   <a:srgbClr val="0066FF"/>
                 </a:solidFill>
-                <a:latin typeface="Liberation Sans" pitchFamily="34"/>
-                <a:ea typeface="Noto Sans CJK SC Regular" pitchFamily="2"/>
-                <a:cs typeface="Liberation Sans" pitchFamily="34"/>
+                <a:latin typeface="Times New Roman" panose="02020603050405020304" pitchFamily="18" charset="0"/>
+                <a:ea typeface="Noto Sans CJK SC Regular" pitchFamily="2"/>
+                <a:cs typeface="Times New Roman" panose="02020603050405020304" pitchFamily="18" charset="0"/>
               </a:rPr>
               <a:t>i</a:t>
             </a:r>
@@ -19744,9 +19744,9 @@
                 <a:solidFill>
                   <a:srgbClr val="0066FF"/>
                 </a:solidFill>
-                <a:latin typeface="Liberation Sans" pitchFamily="34"/>
-                <a:ea typeface="Noto Sans CJK SC Regular" pitchFamily="2"/>
-                <a:cs typeface="Liberation Sans" pitchFamily="34"/>
+                <a:latin typeface="Times New Roman" panose="02020603050405020304" pitchFamily="18" charset="0"/>
+                <a:ea typeface="Noto Sans CJK SC Regular" pitchFamily="2"/>
+                <a:cs typeface="Times New Roman" panose="02020603050405020304" pitchFamily="18" charset="0"/>
               </a:rPr>
               <a:t>(d'))–log(u</a:t>
             </a:r>
@@ -19758,9 +19758,9 @@
                 <a:solidFill>
                   <a:srgbClr val="0066FF"/>
                 </a:solidFill>
-                <a:latin typeface="Liberation Sans" pitchFamily="34"/>
-                <a:ea typeface="Noto Sans CJK SC Regular" pitchFamily="2"/>
-                <a:cs typeface="Liberation Sans" pitchFamily="34"/>
+                <a:latin typeface="Times New Roman" panose="02020603050405020304" pitchFamily="18" charset="0"/>
+                <a:ea typeface="Noto Sans CJK SC Regular" pitchFamily="2"/>
+                <a:cs typeface="Times New Roman" panose="02020603050405020304" pitchFamily="18" charset="0"/>
               </a:rPr>
               <a:t>i</a:t>
             </a:r>
@@ -19772,9 +19772,9 @@
                 <a:solidFill>
                   <a:srgbClr val="0066FF"/>
                 </a:solidFill>
-                <a:latin typeface="Liberation Sans" pitchFamily="34"/>
-                <a:ea typeface="Noto Sans CJK SC Regular" pitchFamily="2"/>
-                <a:cs typeface="Liberation Sans" pitchFamily="34"/>
+                <a:latin typeface="Times New Roman" panose="02020603050405020304" pitchFamily="18" charset="0"/>
+                <a:ea typeface="Noto Sans CJK SC Regular" pitchFamily="2"/>
+                <a:cs typeface="Times New Roman" panose="02020603050405020304" pitchFamily="18" charset="0"/>
               </a:rPr>
               <a:t>(d)) =~ e*(u</a:t>
             </a:r>
@@ -19786,9 +19786,9 @@
                 <a:solidFill>
                   <a:srgbClr val="0066FF"/>
                 </a:solidFill>
-                <a:latin typeface="Liberation Sans" pitchFamily="34"/>
-                <a:ea typeface="Noto Sans CJK SC Regular" pitchFamily="2"/>
-                <a:cs typeface="Liberation Sans" pitchFamily="34"/>
+                <a:latin typeface="Times New Roman" panose="02020603050405020304" pitchFamily="18" charset="0"/>
+                <a:ea typeface="Noto Sans CJK SC Regular" pitchFamily="2"/>
+                <a:cs typeface="Times New Roman" panose="02020603050405020304" pitchFamily="18" charset="0"/>
               </a:rPr>
               <a:t>i,2</a:t>
             </a:r>
@@ -19800,9 +19800,9 @@
                 <a:solidFill>
                   <a:srgbClr val="0066FF"/>
                 </a:solidFill>
-                <a:latin typeface="Liberation Sans" pitchFamily="34"/>
-                <a:ea typeface="Noto Sans CJK SC Regular" pitchFamily="2"/>
-                <a:cs typeface="Liberation Sans" pitchFamily="34"/>
+                <a:latin typeface="Times New Roman" panose="02020603050405020304" pitchFamily="18" charset="0"/>
+                <a:ea typeface="Noto Sans CJK SC Regular" pitchFamily="2"/>
+                <a:cs typeface="Times New Roman" panose="02020603050405020304" pitchFamily="18" charset="0"/>
               </a:rPr>
               <a:t>-u</a:t>
             </a:r>
@@ -19814,9 +19814,9 @@
                 <a:solidFill>
                   <a:srgbClr val="0066FF"/>
                 </a:solidFill>
-                <a:latin typeface="Liberation Sans" pitchFamily="34"/>
-                <a:ea typeface="Noto Sans CJK SC Regular" pitchFamily="2"/>
-                <a:cs typeface="Liberation Sans" pitchFamily="34"/>
+                <a:latin typeface="Times New Roman" panose="02020603050405020304" pitchFamily="18" charset="0"/>
+                <a:ea typeface="Noto Sans CJK SC Regular" pitchFamily="2"/>
+                <a:cs typeface="Times New Roman" panose="02020603050405020304" pitchFamily="18" charset="0"/>
               </a:rPr>
               <a:t>i,1</a:t>
             </a:r>
@@ -19828,9 +19828,9 @@
                 <a:solidFill>
                   <a:srgbClr val="0066FF"/>
                 </a:solidFill>
-                <a:latin typeface="Liberation Sans" pitchFamily="34"/>
-                <a:ea typeface="Noto Sans CJK SC Regular" pitchFamily="2"/>
-                <a:cs typeface="Liberation Sans" pitchFamily="34"/>
+                <a:latin typeface="Times New Roman" panose="02020603050405020304" pitchFamily="18" charset="0"/>
+                <a:ea typeface="Noto Sans CJK SC Regular" pitchFamily="2"/>
+                <a:cs typeface="Times New Roman" panose="02020603050405020304" pitchFamily="18" charset="0"/>
               </a:rPr>
               <a:t>) / u</a:t>
             </a:r>
@@ -19842,9 +19842,9 @@
                 <a:solidFill>
                   <a:srgbClr val="0066FF"/>
                 </a:solidFill>
-                <a:latin typeface="Liberation Sans" pitchFamily="34"/>
-                <a:ea typeface="Noto Sans CJK SC Regular" pitchFamily="2"/>
-                <a:cs typeface="Liberation Sans" pitchFamily="34"/>
+                <a:latin typeface="Times New Roman" panose="02020603050405020304" pitchFamily="18" charset="0"/>
+                <a:ea typeface="Noto Sans CJK SC Regular" pitchFamily="2"/>
+                <a:cs typeface="Times New Roman" panose="02020603050405020304" pitchFamily="18" charset="0"/>
               </a:rPr>
               <a:t>i</a:t>
             </a:r>
@@ -19856,9 +19856,9 @@
                 <a:solidFill>
                   <a:srgbClr val="0066FF"/>
                 </a:solidFill>
-                <a:latin typeface="Liberation Sans" pitchFamily="34"/>
-                <a:ea typeface="Noto Sans CJK SC Regular" pitchFamily="2"/>
-                <a:cs typeface="Liberation Sans" pitchFamily="34"/>
+                <a:latin typeface="Times New Roman" panose="02020603050405020304" pitchFamily="18" charset="0"/>
+                <a:ea typeface="Noto Sans CJK SC Regular" pitchFamily="2"/>
+                <a:cs typeface="Times New Roman" panose="02020603050405020304" pitchFamily="18" charset="0"/>
               </a:rPr>
               <a:t>(d)</a:t>
             </a:r>
@@ -19920,9 +19920,9 @@
                 <a:solidFill>
                   <a:srgbClr val="0066FF"/>
                 </a:solidFill>
-                <a:latin typeface="Liberation Sans" pitchFamily="34"/>
-                <a:ea typeface="Noto Sans CJK SC Regular" pitchFamily="2"/>
-                <a:cs typeface="Liberation Sans" pitchFamily="34"/>
+                <a:latin typeface="Times New Roman" panose="02020603050405020304" pitchFamily="18" charset="0"/>
+                <a:ea typeface="Noto Sans CJK SC Regular" pitchFamily="2"/>
+                <a:cs typeface="Times New Roman" panose="02020603050405020304" pitchFamily="18" charset="0"/>
               </a:rPr>
               <a:t>Sum[i=1,…,n] e*(u</a:t>
             </a:r>
@@ -19934,9 +19934,9 @@
                 <a:solidFill>
                   <a:srgbClr val="0066FF"/>
                 </a:solidFill>
-                <a:latin typeface="Liberation Sans" pitchFamily="34"/>
-                <a:ea typeface="Noto Sans CJK SC Regular" pitchFamily="2"/>
-                <a:cs typeface="Liberation Sans" pitchFamily="34"/>
+                <a:latin typeface="Times New Roman" panose="02020603050405020304" pitchFamily="18" charset="0"/>
+                <a:ea typeface="Noto Sans CJK SC Regular" pitchFamily="2"/>
+                <a:cs typeface="Times New Roman" panose="02020603050405020304" pitchFamily="18" charset="0"/>
               </a:rPr>
               <a:t>i,2</a:t>
             </a:r>
@@ -19948,9 +19948,9 @@
                 <a:solidFill>
                   <a:srgbClr val="0066FF"/>
                 </a:solidFill>
-                <a:latin typeface="Liberation Sans" pitchFamily="34"/>
-                <a:ea typeface="Noto Sans CJK SC Regular" pitchFamily="2"/>
-                <a:cs typeface="Liberation Sans" pitchFamily="34"/>
+                <a:latin typeface="Times New Roman" panose="02020603050405020304" pitchFamily="18" charset="0"/>
+                <a:ea typeface="Noto Sans CJK SC Regular" pitchFamily="2"/>
+                <a:cs typeface="Times New Roman" panose="02020603050405020304" pitchFamily="18" charset="0"/>
               </a:rPr>
               <a:t>-u</a:t>
             </a:r>
@@ -19962,9 +19962,9 @@
                 <a:solidFill>
                   <a:srgbClr val="0066FF"/>
                 </a:solidFill>
-                <a:latin typeface="Liberation Sans" pitchFamily="34"/>
-                <a:ea typeface="Noto Sans CJK SC Regular" pitchFamily="2"/>
-                <a:cs typeface="Liberation Sans" pitchFamily="34"/>
+                <a:latin typeface="Times New Roman" panose="02020603050405020304" pitchFamily="18" charset="0"/>
+                <a:ea typeface="Noto Sans CJK SC Regular" pitchFamily="2"/>
+                <a:cs typeface="Times New Roman" panose="02020603050405020304" pitchFamily="18" charset="0"/>
               </a:rPr>
               <a:t>i,1</a:t>
             </a:r>
@@ -19976,9 +19976,9 @@
                 <a:solidFill>
                   <a:srgbClr val="0066FF"/>
                 </a:solidFill>
-                <a:latin typeface="Liberation Sans" pitchFamily="34"/>
-                <a:ea typeface="Noto Sans CJK SC Regular" pitchFamily="2"/>
-                <a:cs typeface="Liberation Sans" pitchFamily="34"/>
+                <a:latin typeface="Times New Roman" panose="02020603050405020304" pitchFamily="18" charset="0"/>
+                <a:ea typeface="Noto Sans CJK SC Regular" pitchFamily="2"/>
+                <a:cs typeface="Times New Roman" panose="02020603050405020304" pitchFamily="18" charset="0"/>
               </a:rPr>
               <a:t>)/u</a:t>
             </a:r>
@@ -19990,9 +19990,9 @@
                 <a:solidFill>
                   <a:srgbClr val="0066FF"/>
                 </a:solidFill>
-                <a:latin typeface="Liberation Sans" pitchFamily="34"/>
-                <a:ea typeface="Noto Sans CJK SC Regular" pitchFamily="2"/>
-                <a:cs typeface="Liberation Sans" pitchFamily="34"/>
+                <a:latin typeface="Times New Roman" panose="02020603050405020304" pitchFamily="18" charset="0"/>
+                <a:ea typeface="Noto Sans CJK SC Regular" pitchFamily="2"/>
+                <a:cs typeface="Times New Roman" panose="02020603050405020304" pitchFamily="18" charset="0"/>
               </a:rPr>
               <a:t>i</a:t>
             </a:r>
@@ -20004,9 +20004,9 @@
                 <a:solidFill>
                   <a:srgbClr val="0066FF"/>
                 </a:solidFill>
-                <a:latin typeface="Liberation Sans" pitchFamily="34"/>
-                <a:ea typeface="Noto Sans CJK SC Regular" pitchFamily="2"/>
-                <a:cs typeface="Liberation Sans" pitchFamily="34"/>
+                <a:latin typeface="Times New Roman" panose="02020603050405020304" pitchFamily="18" charset="0"/>
+                <a:ea typeface="Noto Sans CJK SC Regular" pitchFamily="2"/>
+                <a:cs typeface="Times New Roman" panose="02020603050405020304" pitchFamily="18" charset="0"/>
               </a:rPr>
               <a:t>(d)  </a:t>
             </a:r>
@@ -20018,9 +20018,9 @@
                 <a:solidFill>
                   <a:srgbClr val="0066FF"/>
                 </a:solidFill>
-                <a:latin typeface="Liberation Sans" pitchFamily="34"/>
-                <a:ea typeface="Noto Sans CJK SC Regular" pitchFamily="2"/>
-                <a:cs typeface="Liberation Sans" pitchFamily="34"/>
+                <a:latin typeface="Times New Roman" panose="02020603050405020304" pitchFamily="18" charset="0"/>
+                <a:ea typeface="Noto Sans CJK SC Regular" pitchFamily="2"/>
+                <a:cs typeface="Times New Roman" panose="02020603050405020304" pitchFamily="18" charset="0"/>
               </a:rPr>
             </a:br>
             <a:r>
@@ -20031,9 +20031,9 @@
                 <a:solidFill>
                   <a:srgbClr val="0066FF"/>
                 </a:solidFill>
-                <a:latin typeface="Liberation Sans" pitchFamily="34"/>
-                <a:ea typeface="Noto Sans CJK SC Regular" pitchFamily="2"/>
-                <a:cs typeface="Liberation Sans" pitchFamily="34"/>
+                <a:latin typeface="Times New Roman" panose="02020603050405020304" pitchFamily="18" charset="0"/>
+                <a:ea typeface="Noto Sans CJK SC Regular" pitchFamily="2"/>
+                <a:cs typeface="Times New Roman" panose="02020603050405020304" pitchFamily="18" charset="0"/>
               </a:rPr>
               <a:t>    =  e * [Sum[i] u</a:t>
             </a:r>
@@ -20045,9 +20045,9 @@
                 <a:solidFill>
                   <a:srgbClr val="0066FF"/>
                 </a:solidFill>
-                <a:latin typeface="Liberation Sans" pitchFamily="34"/>
-                <a:ea typeface="Noto Sans CJK SC Regular" pitchFamily="2"/>
-                <a:cs typeface="Liberation Sans" pitchFamily="34"/>
+                <a:latin typeface="Times New Roman" panose="02020603050405020304" pitchFamily="18" charset="0"/>
+                <a:ea typeface="Noto Sans CJK SC Regular" pitchFamily="2"/>
+                <a:cs typeface="Times New Roman" panose="02020603050405020304" pitchFamily="18" charset="0"/>
               </a:rPr>
               <a:t>i,2</a:t>
             </a:r>
@@ -20059,9 +20059,9 @@
                 <a:solidFill>
                   <a:srgbClr val="0066FF"/>
                 </a:solidFill>
-                <a:latin typeface="Liberation Sans" pitchFamily="34"/>
-                <a:ea typeface="Noto Sans CJK SC Regular" pitchFamily="2"/>
-                <a:cs typeface="Liberation Sans" pitchFamily="34"/>
+                <a:latin typeface="Times New Roman" panose="02020603050405020304" pitchFamily="18" charset="0"/>
+                <a:ea typeface="Noto Sans CJK SC Regular" pitchFamily="2"/>
+                <a:cs typeface="Times New Roman" panose="02020603050405020304" pitchFamily="18" charset="0"/>
               </a:rPr>
               <a:t>/u</a:t>
             </a:r>
@@ -20073,9 +20073,9 @@
                 <a:solidFill>
                   <a:srgbClr val="0066FF"/>
                 </a:solidFill>
-                <a:latin typeface="Liberation Sans" pitchFamily="34"/>
-                <a:ea typeface="Noto Sans CJK SC Regular" pitchFamily="2"/>
-                <a:cs typeface="Liberation Sans" pitchFamily="34"/>
+                <a:latin typeface="Times New Roman" panose="02020603050405020304" pitchFamily="18" charset="0"/>
+                <a:ea typeface="Noto Sans CJK SC Regular" pitchFamily="2"/>
+                <a:cs typeface="Times New Roman" panose="02020603050405020304" pitchFamily="18" charset="0"/>
               </a:rPr>
               <a:t>i</a:t>
             </a:r>
@@ -20087,9 +20087,9 @@
                 <a:solidFill>
                   <a:srgbClr val="0066FF"/>
                 </a:solidFill>
-                <a:latin typeface="Liberation Sans" pitchFamily="34"/>
-                <a:ea typeface="Noto Sans CJK SC Regular" pitchFamily="2"/>
-                <a:cs typeface="Liberation Sans" pitchFamily="34"/>
+                <a:latin typeface="Times New Roman" panose="02020603050405020304" pitchFamily="18" charset="0"/>
+                <a:ea typeface="Noto Sans CJK SC Regular" pitchFamily="2"/>
+                <a:cs typeface="Times New Roman" panose="02020603050405020304" pitchFamily="18" charset="0"/>
               </a:rPr>
               <a:t>(d)  -  Sum[i] u</a:t>
             </a:r>
@@ -20101,9 +20101,9 @@
                 <a:solidFill>
                   <a:srgbClr val="0066FF"/>
                 </a:solidFill>
-                <a:latin typeface="Liberation Sans" pitchFamily="34"/>
-                <a:ea typeface="Noto Sans CJK SC Regular" pitchFamily="2"/>
-                <a:cs typeface="Liberation Sans" pitchFamily="34"/>
+                <a:latin typeface="Times New Roman" panose="02020603050405020304" pitchFamily="18" charset="0"/>
+                <a:ea typeface="Noto Sans CJK SC Regular" pitchFamily="2"/>
+                <a:cs typeface="Times New Roman" panose="02020603050405020304" pitchFamily="18" charset="0"/>
               </a:rPr>
               <a:t>i,1</a:t>
             </a:r>
@@ -20115,9 +20115,9 @@
                 <a:solidFill>
                   <a:srgbClr val="0066FF"/>
                 </a:solidFill>
-                <a:latin typeface="Liberation Sans" pitchFamily="34"/>
-                <a:ea typeface="Noto Sans CJK SC Regular" pitchFamily="2"/>
-                <a:cs typeface="Liberation Sans" pitchFamily="34"/>
+                <a:latin typeface="Times New Roman" panose="02020603050405020304" pitchFamily="18" charset="0"/>
+                <a:ea typeface="Noto Sans CJK SC Regular" pitchFamily="2"/>
+                <a:cs typeface="Times New Roman" panose="02020603050405020304" pitchFamily="18" charset="0"/>
               </a:rPr>
               <a:t>/u</a:t>
             </a:r>
@@ -20129,9 +20129,9 @@
                 <a:solidFill>
                   <a:srgbClr val="0066FF"/>
                 </a:solidFill>
-                <a:latin typeface="Liberation Sans" pitchFamily="34"/>
-                <a:ea typeface="Noto Sans CJK SC Regular" pitchFamily="2"/>
-                <a:cs typeface="Liberation Sans" pitchFamily="34"/>
+                <a:latin typeface="Times New Roman" panose="02020603050405020304" pitchFamily="18" charset="0"/>
+                <a:ea typeface="Noto Sans CJK SC Regular" pitchFamily="2"/>
+                <a:cs typeface="Times New Roman" panose="02020603050405020304" pitchFamily="18" charset="0"/>
               </a:rPr>
               <a:t>i</a:t>
             </a:r>
@@ -20143,9 +20143,9 @@
                 <a:solidFill>
                   <a:srgbClr val="0066FF"/>
                 </a:solidFill>
-                <a:latin typeface="Liberation Sans" pitchFamily="34"/>
-                <a:ea typeface="Noto Sans CJK SC Regular" pitchFamily="2"/>
-                <a:cs typeface="Liberation Sans" pitchFamily="34"/>
+                <a:latin typeface="Times New Roman" panose="02020603050405020304" pitchFamily="18" charset="0"/>
+                <a:ea typeface="Noto Sans CJK SC Regular" pitchFamily="2"/>
+                <a:cs typeface="Times New Roman" panose="02020603050405020304" pitchFamily="18" charset="0"/>
               </a:rPr>
               <a:t>(d)].</a:t>
             </a:r>
@@ -20445,11 +20445,11 @@
                 <a:solidFill>
                   <a:srgbClr val="0066FF"/>
                 </a:solidFill>
-                <a:latin typeface="Liberation Sans" pitchFamily="34"/>
+                <a:latin typeface="Times New Roman" panose="02020603050405020304" pitchFamily="18" charset="0"/>
                 <a:ea typeface="David CLM" pitchFamily="2"/>
-                <a:cs typeface="Liberation Sans" pitchFamily="34"/>
-              </a:rPr>
-              <a:t>Sum[i] u</a:t>
+                <a:cs typeface="Times New Roman" panose="02020603050405020304" pitchFamily="18" charset="0"/>
+              </a:rPr>
+              <a:t>Sum[ i ] u</a:t>
             </a:r>
             <a:r>
               <a:rPr lang="en-US" sz="3600" b="0" i="0" u="none" strike="noStrike" kern="1200" cap="none" baseline="-33000">
@@ -20459,9 +20459,9 @@
                 <a:solidFill>
                   <a:srgbClr val="0066FF"/>
                 </a:solidFill>
-                <a:latin typeface="Liberation Sans" pitchFamily="34"/>
+                <a:latin typeface="Times New Roman" panose="02020603050405020304" pitchFamily="18" charset="0"/>
                 <a:ea typeface="David CLM" pitchFamily="2"/>
-                <a:cs typeface="Liberation Sans" pitchFamily="34"/>
+                <a:cs typeface="Times New Roman" panose="02020603050405020304" pitchFamily="18" charset="0"/>
               </a:rPr>
               <a:t>i,2</a:t>
             </a:r>
@@ -20473,9 +20473,9 @@
                 <a:solidFill>
                   <a:srgbClr val="0066FF"/>
                 </a:solidFill>
-                <a:latin typeface="Liberation Sans" pitchFamily="34"/>
+                <a:latin typeface="Times New Roman" panose="02020603050405020304" pitchFamily="18" charset="0"/>
                 <a:ea typeface="David CLM" pitchFamily="2"/>
-                <a:cs typeface="Liberation Sans" pitchFamily="34"/>
+                <a:cs typeface="Times New Roman" panose="02020603050405020304" pitchFamily="18" charset="0"/>
               </a:rPr>
               <a:t>/u</a:t>
             </a:r>
@@ -20487,9 +20487,9 @@
                 <a:solidFill>
                   <a:srgbClr val="0066FF"/>
                 </a:solidFill>
-                <a:latin typeface="Liberation Sans" pitchFamily="34"/>
+                <a:latin typeface="Times New Roman" panose="02020603050405020304" pitchFamily="18" charset="0"/>
                 <a:ea typeface="David CLM" pitchFamily="2"/>
-                <a:cs typeface="Liberation Sans" pitchFamily="34"/>
+                <a:cs typeface="Times New Roman" panose="02020603050405020304" pitchFamily="18" charset="0"/>
               </a:rPr>
               <a:t>i</a:t>
             </a:r>
@@ -20501,9 +20501,9 @@
                 <a:solidFill>
                   <a:srgbClr val="0066FF"/>
                 </a:solidFill>
-                <a:latin typeface="Liberation Sans" pitchFamily="34"/>
+                <a:latin typeface="Times New Roman" panose="02020603050405020304" pitchFamily="18" charset="0"/>
                 <a:ea typeface="David CLM" pitchFamily="2"/>
-                <a:cs typeface="Liberation Sans" pitchFamily="34"/>
+                <a:cs typeface="Times New Roman" panose="02020603050405020304" pitchFamily="18" charset="0"/>
               </a:rPr>
               <a:t>(d)  -  Sum[i] u</a:t>
             </a:r>
@@ -20515,9 +20515,9 @@
                 <a:solidFill>
                   <a:srgbClr val="0066FF"/>
                 </a:solidFill>
-                <a:latin typeface="Liberation Sans" pitchFamily="34"/>
+                <a:latin typeface="Times New Roman" panose="02020603050405020304" pitchFamily="18" charset="0"/>
                 <a:ea typeface="David CLM" pitchFamily="2"/>
-                <a:cs typeface="Liberation Sans" pitchFamily="34"/>
+                <a:cs typeface="Times New Roman" panose="02020603050405020304" pitchFamily="18" charset="0"/>
               </a:rPr>
               <a:t>i,1</a:t>
             </a:r>
@@ -20529,9 +20529,9 @@
                 <a:solidFill>
                   <a:srgbClr val="0066FF"/>
                 </a:solidFill>
-                <a:latin typeface="Liberation Sans" pitchFamily="34"/>
+                <a:latin typeface="Times New Roman" panose="02020603050405020304" pitchFamily="18" charset="0"/>
                 <a:ea typeface="David CLM" pitchFamily="2"/>
-                <a:cs typeface="Liberation Sans" pitchFamily="34"/>
+                <a:cs typeface="Times New Roman" panose="02020603050405020304" pitchFamily="18" charset="0"/>
               </a:rPr>
               <a:t>/u</a:t>
             </a:r>
@@ -20543,9 +20543,9 @@
                 <a:solidFill>
                   <a:srgbClr val="0066FF"/>
                 </a:solidFill>
-                <a:latin typeface="Liberation Sans" pitchFamily="34"/>
+                <a:latin typeface="Times New Roman" panose="02020603050405020304" pitchFamily="18" charset="0"/>
                 <a:ea typeface="David CLM" pitchFamily="2"/>
-                <a:cs typeface="Liberation Sans" pitchFamily="34"/>
+                <a:cs typeface="Times New Roman" panose="02020603050405020304" pitchFamily="18" charset="0"/>
               </a:rPr>
               <a:t>i</a:t>
             </a:r>
@@ -20557,9 +20557,9 @@
                 <a:solidFill>
                   <a:srgbClr val="0066FF"/>
                 </a:solidFill>
-                <a:latin typeface="Liberation Sans" pitchFamily="34"/>
+                <a:latin typeface="Times New Roman" panose="02020603050405020304" pitchFamily="18" charset="0"/>
                 <a:ea typeface="David CLM" pitchFamily="2"/>
-                <a:cs typeface="Liberation Sans" pitchFamily="34"/>
+                <a:cs typeface="Times New Roman" panose="02020603050405020304" pitchFamily="18" charset="0"/>
               </a:rPr>
               <a:t>(d) ≤ 0</a:t>
             </a:r>
@@ -20568,9 +20568,9 @@
                 <a:solidFill>
                   <a:srgbClr val="0066FF"/>
                 </a:solidFill>
-                <a:latin typeface="Liberation Sans" pitchFamily="34"/>
+                <a:latin typeface="Times New Roman" panose="02020603050405020304" pitchFamily="18" charset="0"/>
                 <a:ea typeface="David CLM" pitchFamily="2"/>
-                <a:cs typeface="Liberation Sans" pitchFamily="34"/>
+                <a:cs typeface="Times New Roman" panose="02020603050405020304" pitchFamily="18" charset="0"/>
               </a:rPr>
               <a:t>.</a:t>
             </a:r>
@@ -20581,9 +20581,9 @@
               <a:solidFill>
                 <a:srgbClr val="0066FF"/>
               </a:solidFill>
-              <a:latin typeface="Liberation Sans" pitchFamily="34"/>
+              <a:latin typeface="Times New Roman" panose="02020603050405020304" pitchFamily="18" charset="0"/>
               <a:ea typeface="David CLM" pitchFamily="2"/>
-              <a:cs typeface="Liberation Sans" pitchFamily="34"/>
+              <a:cs typeface="Times New Roman" panose="02020603050405020304" pitchFamily="18" charset="0"/>
             </a:endParaRPr>
           </a:p>
           <a:p>
@@ -20650,11 +20650,11 @@
                 <a:solidFill>
                   <a:srgbClr val="0066FF"/>
                 </a:solidFill>
-                <a:latin typeface="Liberation Sans" pitchFamily="34"/>
+                <a:latin typeface="Times New Roman" panose="02020603050405020304" pitchFamily="18" charset="0"/>
                 <a:ea typeface="David CLM" pitchFamily="2"/>
-                <a:cs typeface="Liberation Sans" pitchFamily="34"/>
-              </a:rPr>
-              <a:t>Sum[i] u</a:t>
+                <a:cs typeface="Times New Roman" panose="02020603050405020304" pitchFamily="18" charset="0"/>
+              </a:rPr>
+              <a:t>Sum[ i ] u</a:t>
             </a:r>
             <a:r>
               <a:rPr lang="en-US" sz="3600" b="0" i="0" u="none" strike="noStrike" kern="1200" cap="none" baseline="-33000">
@@ -20664,9 +20664,9 @@
                 <a:solidFill>
                   <a:srgbClr val="0066FF"/>
                 </a:solidFill>
-                <a:latin typeface="Liberation Sans" pitchFamily="34"/>
+                <a:latin typeface="Times New Roman" panose="02020603050405020304" pitchFamily="18" charset="0"/>
                 <a:ea typeface="David CLM" pitchFamily="2"/>
-                <a:cs typeface="Liberation Sans" pitchFamily="34"/>
+                <a:cs typeface="Times New Roman" panose="02020603050405020304" pitchFamily="18" charset="0"/>
               </a:rPr>
               <a:t>i,1</a:t>
             </a:r>
@@ -20678,9 +20678,9 @@
                 <a:solidFill>
                   <a:srgbClr val="0066FF"/>
                 </a:solidFill>
-                <a:latin typeface="Liberation Sans" pitchFamily="34"/>
+                <a:latin typeface="Times New Roman" panose="02020603050405020304" pitchFamily="18" charset="0"/>
                 <a:ea typeface="David CLM" pitchFamily="2"/>
-                <a:cs typeface="Liberation Sans" pitchFamily="34"/>
+                <a:cs typeface="Times New Roman" panose="02020603050405020304" pitchFamily="18" charset="0"/>
               </a:rPr>
               <a:t>/u</a:t>
             </a:r>
@@ -20692,9 +20692,9 @@
                 <a:solidFill>
                   <a:srgbClr val="0066FF"/>
                 </a:solidFill>
-                <a:latin typeface="Liberation Sans" pitchFamily="34"/>
+                <a:latin typeface="Times New Roman" panose="02020603050405020304" pitchFamily="18" charset="0"/>
                 <a:ea typeface="David CLM" pitchFamily="2"/>
-                <a:cs typeface="Liberation Sans" pitchFamily="34"/>
+                <a:cs typeface="Times New Roman" panose="02020603050405020304" pitchFamily="18" charset="0"/>
               </a:rPr>
               <a:t>i</a:t>
             </a:r>
@@ -20706,9 +20706,9 @@
                 <a:solidFill>
                   <a:srgbClr val="0066FF"/>
                 </a:solidFill>
-                <a:latin typeface="Liberation Sans" pitchFamily="34"/>
+                <a:latin typeface="Times New Roman" panose="02020603050405020304" pitchFamily="18" charset="0"/>
                 <a:ea typeface="David CLM" pitchFamily="2"/>
-                <a:cs typeface="Liberation Sans" pitchFamily="34"/>
+                <a:cs typeface="Times New Roman" panose="02020603050405020304" pitchFamily="18" charset="0"/>
               </a:rPr>
               <a:t>(d)  -  Sum[i] u</a:t>
             </a:r>
@@ -20720,9 +20720,9 @@
                 <a:solidFill>
                   <a:srgbClr val="0066FF"/>
                 </a:solidFill>
-                <a:latin typeface="Liberation Sans" pitchFamily="34"/>
+                <a:latin typeface="Times New Roman" panose="02020603050405020304" pitchFamily="18" charset="0"/>
                 <a:ea typeface="David CLM" pitchFamily="2"/>
-                <a:cs typeface="Liberation Sans" pitchFamily="34"/>
+                <a:cs typeface="Times New Roman" panose="02020603050405020304" pitchFamily="18" charset="0"/>
               </a:rPr>
               <a:t>i,2</a:t>
             </a:r>
@@ -20734,9 +20734,9 @@
                 <a:solidFill>
                   <a:srgbClr val="0066FF"/>
                 </a:solidFill>
-                <a:latin typeface="Liberation Sans" pitchFamily="34"/>
+                <a:latin typeface="Times New Roman" panose="02020603050405020304" pitchFamily="18" charset="0"/>
                 <a:ea typeface="David CLM" pitchFamily="2"/>
-                <a:cs typeface="Liberation Sans" pitchFamily="34"/>
+                <a:cs typeface="Times New Roman" panose="02020603050405020304" pitchFamily="18" charset="0"/>
               </a:rPr>
               <a:t>/u</a:t>
             </a:r>
@@ -20748,9 +20748,9 @@
                 <a:solidFill>
                   <a:srgbClr val="0066FF"/>
                 </a:solidFill>
-                <a:latin typeface="Liberation Sans" pitchFamily="34"/>
+                <a:latin typeface="Times New Roman" panose="02020603050405020304" pitchFamily="18" charset="0"/>
                 <a:ea typeface="David CLM" pitchFamily="2"/>
-                <a:cs typeface="Liberation Sans" pitchFamily="34"/>
+                <a:cs typeface="Times New Roman" panose="02020603050405020304" pitchFamily="18" charset="0"/>
               </a:rPr>
               <a:t>i</a:t>
             </a:r>
@@ -20762,9 +20762,9 @@
                 <a:solidFill>
                   <a:srgbClr val="0066FF"/>
                 </a:solidFill>
-                <a:latin typeface="Liberation Sans" pitchFamily="34"/>
+                <a:latin typeface="Times New Roman" panose="02020603050405020304" pitchFamily="18" charset="0"/>
                 <a:ea typeface="David CLM" pitchFamily="2"/>
-                <a:cs typeface="Liberation Sans" pitchFamily="34"/>
+                <a:cs typeface="Times New Roman" panose="02020603050405020304" pitchFamily="18" charset="0"/>
               </a:rPr>
               <a:t>(d) ≤ 0.</a:t>
             </a:r>
@@ -20817,9 +20817,9 @@
                 <a:solidFill>
                   <a:srgbClr val="0066FF"/>
                 </a:solidFill>
-                <a:latin typeface="Liberation Sans" pitchFamily="34"/>
+                <a:latin typeface="Times New Roman" panose="02020603050405020304" pitchFamily="18" charset="0"/>
                 <a:ea typeface="David CLM" pitchFamily="2"/>
-                <a:cs typeface="Liberation Sans" pitchFamily="34"/>
+                <a:cs typeface="Times New Roman" panose="02020603050405020304" pitchFamily="18" charset="0"/>
               </a:rPr>
               <a:t>Sum[i] u</a:t>
             </a:r>
@@ -20831,9 +20831,9 @@
                 <a:solidFill>
                   <a:srgbClr val="0066FF"/>
                 </a:solidFill>
-                <a:latin typeface="Liberation Sans" pitchFamily="34"/>
+                <a:latin typeface="Times New Roman" panose="02020603050405020304" pitchFamily="18" charset="0"/>
                 <a:ea typeface="David CLM" pitchFamily="2"/>
-                <a:cs typeface="Liberation Sans" pitchFamily="34"/>
+                <a:cs typeface="Times New Roman" panose="02020603050405020304" pitchFamily="18" charset="0"/>
               </a:rPr>
               <a:t>i,1</a:t>
             </a:r>
@@ -20845,9 +20845,9 @@
                 <a:solidFill>
                   <a:srgbClr val="0066FF"/>
                 </a:solidFill>
-                <a:latin typeface="Liberation Sans" pitchFamily="34"/>
+                <a:latin typeface="Times New Roman" panose="02020603050405020304" pitchFamily="18" charset="0"/>
                 <a:ea typeface="David CLM" pitchFamily="2"/>
-                <a:cs typeface="Liberation Sans" pitchFamily="34"/>
+                <a:cs typeface="Times New Roman" panose="02020603050405020304" pitchFamily="18" charset="0"/>
               </a:rPr>
               <a:t>/u</a:t>
             </a:r>
@@ -20859,9 +20859,9 @@
                 <a:solidFill>
                   <a:srgbClr val="0066FF"/>
                 </a:solidFill>
-                <a:latin typeface="Liberation Sans" pitchFamily="34"/>
+                <a:latin typeface="Times New Roman" panose="02020603050405020304" pitchFamily="18" charset="0"/>
                 <a:ea typeface="David CLM" pitchFamily="2"/>
-                <a:cs typeface="Liberation Sans" pitchFamily="34"/>
+                <a:cs typeface="Times New Roman" panose="02020603050405020304" pitchFamily="18" charset="0"/>
               </a:rPr>
               <a:t>i</a:t>
             </a:r>
@@ -20873,9 +20873,9 @@
                 <a:solidFill>
                   <a:srgbClr val="0066FF"/>
                 </a:solidFill>
-                <a:latin typeface="Liberation Sans" pitchFamily="34"/>
+                <a:latin typeface="Times New Roman" panose="02020603050405020304" pitchFamily="18" charset="0"/>
                 <a:ea typeface="David CLM" pitchFamily="2"/>
-                <a:cs typeface="Liberation Sans" pitchFamily="34"/>
+                <a:cs typeface="Times New Roman" panose="02020603050405020304" pitchFamily="18" charset="0"/>
               </a:rPr>
               <a:t>(d)  =  Sum[i] u</a:t>
             </a:r>
@@ -20887,9 +20887,9 @@
                 <a:solidFill>
                   <a:srgbClr val="0066FF"/>
                 </a:solidFill>
-                <a:latin typeface="Liberation Sans" pitchFamily="34"/>
+                <a:latin typeface="Times New Roman" panose="02020603050405020304" pitchFamily="18" charset="0"/>
                 <a:ea typeface="David CLM" pitchFamily="2"/>
-                <a:cs typeface="Liberation Sans" pitchFamily="34"/>
+                <a:cs typeface="Times New Roman" panose="02020603050405020304" pitchFamily="18" charset="0"/>
               </a:rPr>
               <a:t>i,2</a:t>
             </a:r>
@@ -20901,9 +20901,9 @@
                 <a:solidFill>
                   <a:srgbClr val="0066FF"/>
                 </a:solidFill>
-                <a:latin typeface="Liberation Sans" pitchFamily="34"/>
+                <a:latin typeface="Times New Roman" panose="02020603050405020304" pitchFamily="18" charset="0"/>
                 <a:ea typeface="David CLM" pitchFamily="2"/>
-                <a:cs typeface="Liberation Sans" pitchFamily="34"/>
+                <a:cs typeface="Times New Roman" panose="02020603050405020304" pitchFamily="18" charset="0"/>
               </a:rPr>
               <a:t>/u</a:t>
             </a:r>
@@ -20915,9 +20915,9 @@
                 <a:solidFill>
                   <a:srgbClr val="0066FF"/>
                 </a:solidFill>
-                <a:latin typeface="Liberation Sans" pitchFamily="34"/>
+                <a:latin typeface="Times New Roman" panose="02020603050405020304" pitchFamily="18" charset="0"/>
                 <a:ea typeface="David CLM" pitchFamily="2"/>
-                <a:cs typeface="Liberation Sans" pitchFamily="34"/>
+                <a:cs typeface="Times New Roman" panose="02020603050405020304" pitchFamily="18" charset="0"/>
               </a:rPr>
               <a:t>i</a:t>
             </a:r>
@@ -20929,9 +20929,9 @@
                 <a:solidFill>
                   <a:srgbClr val="0066FF"/>
                 </a:solidFill>
-                <a:latin typeface="Liberation Sans" pitchFamily="34"/>
+                <a:latin typeface="Times New Roman" panose="02020603050405020304" pitchFamily="18" charset="0"/>
                 <a:ea typeface="David CLM" pitchFamily="2"/>
-                <a:cs typeface="Liberation Sans" pitchFamily="34"/>
+                <a:cs typeface="Times New Roman" panose="02020603050405020304" pitchFamily="18" charset="0"/>
               </a:rPr>
               <a:t>(d).</a:t>
             </a:r>
@@ -21014,9 +21014,9 @@
                 <a:solidFill>
                   <a:srgbClr val="0066FF"/>
                 </a:solidFill>
-                <a:latin typeface="Liberation Sans" pitchFamily="34"/>
+                <a:latin typeface="Times New Roman" panose="02020603050405020304" pitchFamily="18" charset="0"/>
                 <a:ea typeface="David CLM" pitchFamily="2"/>
-                <a:cs typeface="Liberation Sans" pitchFamily="34"/>
+                <a:cs typeface="Times New Roman" panose="02020603050405020304" pitchFamily="18" charset="0"/>
               </a:rPr>
               <a:t>Sum[i] u</a:t>
             </a:r>
@@ -21028,9 +21028,9 @@
                 <a:solidFill>
                   <a:srgbClr val="0066FF"/>
                 </a:solidFill>
-                <a:latin typeface="Liberation Sans" pitchFamily="34"/>
+                <a:latin typeface="Times New Roman" panose="02020603050405020304" pitchFamily="18" charset="0"/>
                 <a:ea typeface="David CLM" pitchFamily="2"/>
-                <a:cs typeface="Liberation Sans" pitchFamily="34"/>
+                <a:cs typeface="Times New Roman" panose="02020603050405020304" pitchFamily="18" charset="0"/>
               </a:rPr>
               <a:t>i,j</a:t>
             </a:r>
@@ -21042,9 +21042,9 @@
                 <a:solidFill>
                   <a:srgbClr val="0066FF"/>
                 </a:solidFill>
-                <a:latin typeface="Liberation Sans" pitchFamily="34"/>
+                <a:latin typeface="Times New Roman" panose="02020603050405020304" pitchFamily="18" charset="0"/>
                 <a:ea typeface="David CLM" pitchFamily="2"/>
-                <a:cs typeface="Liberation Sans" pitchFamily="34"/>
+                <a:cs typeface="Times New Roman" panose="02020603050405020304" pitchFamily="18" charset="0"/>
               </a:rPr>
               <a:t>/u</a:t>
             </a:r>
@@ -21056,9 +21056,9 @@
                 <a:solidFill>
                   <a:srgbClr val="0066FF"/>
                 </a:solidFill>
-                <a:latin typeface="Liberation Sans" pitchFamily="34"/>
+                <a:latin typeface="Times New Roman" panose="02020603050405020304" pitchFamily="18" charset="0"/>
                 <a:ea typeface="David CLM" pitchFamily="2"/>
-                <a:cs typeface="Liberation Sans" pitchFamily="34"/>
+                <a:cs typeface="Times New Roman" panose="02020603050405020304" pitchFamily="18" charset="0"/>
               </a:rPr>
               <a:t>i</a:t>
             </a:r>
@@ -21070,9 +21070,9 @@
                 <a:solidFill>
                   <a:srgbClr val="0066FF"/>
                 </a:solidFill>
-                <a:latin typeface="Liberation Sans" pitchFamily="34"/>
+                <a:latin typeface="Times New Roman" panose="02020603050405020304" pitchFamily="18" charset="0"/>
                 <a:ea typeface="David CLM" pitchFamily="2"/>
-                <a:cs typeface="Liberation Sans" pitchFamily="34"/>
+                <a:cs typeface="Times New Roman" panose="02020603050405020304" pitchFamily="18" charset="0"/>
               </a:rPr>
               <a:t>(d) = Z    for all   j in 1,…, m.</a:t>
             </a:r>
@@ -21358,9 +21358,9 @@
                 <a:solidFill>
                   <a:srgbClr val="9933FF"/>
                 </a:solidFill>
-                <a:latin typeface="Liberation Sans" pitchFamily="34"/>
+                <a:latin typeface="Times New Roman" panose="02020603050405020304" pitchFamily="18" charset="0"/>
                 <a:ea typeface="David CLM" pitchFamily="2"/>
-                <a:cs typeface="Liberation Sans" pitchFamily="34"/>
+                <a:cs typeface="Times New Roman" panose="02020603050405020304" pitchFamily="18" charset="0"/>
               </a:rPr>
               <a:t>d</a:t>
             </a:r>
@@ -21372,9 +21372,9 @@
                 <a:solidFill>
                   <a:srgbClr val="9933FF"/>
                 </a:solidFill>
-                <a:latin typeface="Liberation Sans" pitchFamily="34"/>
+                <a:latin typeface="Times New Roman" panose="02020603050405020304" pitchFamily="18" charset="0"/>
                 <a:ea typeface="David CLM" pitchFamily="2"/>
-                <a:cs typeface="Liberation Sans" pitchFamily="34"/>
+                <a:cs typeface="Times New Roman" panose="02020603050405020304" pitchFamily="18" charset="0"/>
               </a:rPr>
               <a:t>i,j</a:t>
             </a:r>
@@ -21386,9 +21386,9 @@
                 <a:solidFill>
                   <a:srgbClr val="9933FF"/>
                 </a:solidFill>
-                <a:latin typeface="Liberation Sans" pitchFamily="34"/>
+                <a:latin typeface="Times New Roman" panose="02020603050405020304" pitchFamily="18" charset="0"/>
                 <a:ea typeface="David CLM" pitchFamily="2"/>
-                <a:cs typeface="Liberation Sans" pitchFamily="34"/>
+                <a:cs typeface="Times New Roman" panose="02020603050405020304" pitchFamily="18" charset="0"/>
               </a:rPr>
               <a:t> := (C/n) * (d</a:t>
             </a:r>
@@ -21400,9 +21400,9 @@
                 <a:solidFill>
                   <a:srgbClr val="9933FF"/>
                 </a:solidFill>
-                <a:latin typeface="Liberation Sans" pitchFamily="34"/>
+                <a:latin typeface="Times New Roman" panose="02020603050405020304" pitchFamily="18" charset="0"/>
                 <a:ea typeface="David CLM" pitchFamily="2"/>
-                <a:cs typeface="Liberation Sans" pitchFamily="34"/>
+                <a:cs typeface="Times New Roman" panose="02020603050405020304" pitchFamily="18" charset="0"/>
               </a:rPr>
               <a:t>j </a:t>
             </a:r>
@@ -21414,9 +21414,9 @@
                 <a:solidFill>
                   <a:srgbClr val="9933FF"/>
                 </a:solidFill>
-                <a:latin typeface="Liberation Sans" pitchFamily="34"/>
+                <a:latin typeface="Times New Roman" panose="02020603050405020304" pitchFamily="18" charset="0"/>
                 <a:ea typeface="David CLM" pitchFamily="2"/>
-                <a:cs typeface="Liberation Sans" pitchFamily="34"/>
+                <a:cs typeface="Times New Roman" panose="02020603050405020304" pitchFamily="18" charset="0"/>
               </a:rPr>
               <a:t>* u</a:t>
             </a:r>
@@ -21428,9 +21428,9 @@
                 <a:solidFill>
                   <a:srgbClr val="9933FF"/>
                 </a:solidFill>
-                <a:latin typeface="Liberation Sans" pitchFamily="34"/>
+                <a:latin typeface="Times New Roman" panose="02020603050405020304" pitchFamily="18" charset="0"/>
                 <a:ea typeface="David CLM" pitchFamily="2"/>
-                <a:cs typeface="Liberation Sans" pitchFamily="34"/>
+                <a:cs typeface="Times New Roman" panose="02020603050405020304" pitchFamily="18" charset="0"/>
               </a:rPr>
               <a:t>i,j </a:t>
             </a:r>
@@ -21442,9 +21442,9 @@
                 <a:solidFill>
                   <a:srgbClr val="9933FF"/>
                 </a:solidFill>
-                <a:latin typeface="Liberation Sans" pitchFamily="34"/>
+                <a:latin typeface="Times New Roman" panose="02020603050405020304" pitchFamily="18" charset="0"/>
                 <a:ea typeface="David CLM" pitchFamily="2"/>
-                <a:cs typeface="Liberation Sans" pitchFamily="34"/>
+                <a:cs typeface="Times New Roman" panose="02020603050405020304" pitchFamily="18" charset="0"/>
               </a:rPr>
               <a:t>/ u</a:t>
             </a:r>
@@ -21456,9 +21456,9 @@
                 <a:solidFill>
                   <a:srgbClr val="9933FF"/>
                 </a:solidFill>
-                <a:latin typeface="Liberation Sans" pitchFamily="34"/>
+                <a:latin typeface="Times New Roman" panose="02020603050405020304" pitchFamily="18" charset="0"/>
                 <a:ea typeface="David CLM" pitchFamily="2"/>
-                <a:cs typeface="Liberation Sans" pitchFamily="34"/>
+                <a:cs typeface="Times New Roman" panose="02020603050405020304" pitchFamily="18" charset="0"/>
               </a:rPr>
               <a:t>i</a:t>
             </a:r>
@@ -21470,9 +21470,9 @@
                 <a:solidFill>
                   <a:srgbClr val="9933FF"/>
                 </a:solidFill>
-                <a:latin typeface="Liberation Sans" pitchFamily="34"/>
+                <a:latin typeface="Times New Roman" panose="02020603050405020304" pitchFamily="18" charset="0"/>
                 <a:ea typeface="David CLM" pitchFamily="2"/>
-                <a:cs typeface="Liberation Sans" pitchFamily="34"/>
+                <a:cs typeface="Times New Roman" panose="02020603050405020304" pitchFamily="18" charset="0"/>
               </a:rPr>
               <a:t>(d))</a:t>
             </a:r>
@@ -21570,11 +21570,11 @@
                 <a:solidFill>
                   <a:srgbClr val="0066FF"/>
                 </a:solidFill>
-                <a:latin typeface="Liberation Sans" pitchFamily="34"/>
+                <a:latin typeface="Times New Roman" panose="02020603050405020304" pitchFamily="18" charset="0"/>
                 <a:ea typeface="David CLM" pitchFamily="2"/>
-                <a:cs typeface="Liberation Sans" pitchFamily="34"/>
-              </a:rPr>
-              <a:t>Sum[j] d</a:t>
+                <a:cs typeface="Times New Roman" panose="02020603050405020304" pitchFamily="18" charset="0"/>
+              </a:rPr>
+              <a:t>Sum[ j ] d</a:t>
             </a:r>
             <a:r>
               <a:rPr lang="en-US" sz="3600" b="0" i="0" u="none" strike="noStrike" kern="1200" cap="none" baseline="-8000">
@@ -21584,9 +21584,9 @@
                 <a:solidFill>
                   <a:srgbClr val="0066FF"/>
                 </a:solidFill>
-                <a:latin typeface="Liberation Sans" pitchFamily="34"/>
+                <a:latin typeface="Times New Roman" panose="02020603050405020304" pitchFamily="18" charset="0"/>
                 <a:ea typeface="David CLM" pitchFamily="2"/>
-                <a:cs typeface="Liberation Sans" pitchFamily="34"/>
+                <a:cs typeface="Times New Roman" panose="02020603050405020304" pitchFamily="18" charset="0"/>
               </a:rPr>
               <a:t>i,j</a:t>
             </a:r>
@@ -21598,9 +21598,9 @@
                 <a:solidFill>
                   <a:srgbClr val="0066FF"/>
                 </a:solidFill>
-                <a:latin typeface="Liberation Sans" pitchFamily="34"/>
+                <a:latin typeface="Times New Roman" panose="02020603050405020304" pitchFamily="18" charset="0"/>
                 <a:ea typeface="David CLM" pitchFamily="2"/>
-                <a:cs typeface="Liberation Sans" pitchFamily="34"/>
+                <a:cs typeface="Times New Roman" panose="02020603050405020304" pitchFamily="18" charset="0"/>
               </a:rPr>
               <a:t> = (C/n) * Sum[j](d</a:t>
             </a:r>
@@ -21612,9 +21612,9 @@
                 <a:solidFill>
                   <a:srgbClr val="0066FF"/>
                 </a:solidFill>
-                <a:latin typeface="Liberation Sans" pitchFamily="34"/>
+                <a:latin typeface="Times New Roman" panose="02020603050405020304" pitchFamily="18" charset="0"/>
                 <a:ea typeface="David CLM" pitchFamily="2"/>
-                <a:cs typeface="Liberation Sans" pitchFamily="34"/>
+                <a:cs typeface="Times New Roman" panose="02020603050405020304" pitchFamily="18" charset="0"/>
               </a:rPr>
               <a:t>j</a:t>
             </a:r>
@@ -21626,9 +21626,9 @@
                 <a:solidFill>
                   <a:srgbClr val="0066FF"/>
                 </a:solidFill>
-                <a:latin typeface="Liberation Sans" pitchFamily="34"/>
+                <a:latin typeface="Times New Roman" panose="02020603050405020304" pitchFamily="18" charset="0"/>
                 <a:ea typeface="David CLM" pitchFamily="2"/>
-                <a:cs typeface="Liberation Sans" pitchFamily="34"/>
+                <a:cs typeface="Times New Roman" panose="02020603050405020304" pitchFamily="18" charset="0"/>
               </a:rPr>
               <a:t>*u</a:t>
             </a:r>
@@ -21640,9 +21640,9 @@
                 <a:solidFill>
                   <a:srgbClr val="0066FF"/>
                 </a:solidFill>
-                <a:latin typeface="Liberation Sans" pitchFamily="34"/>
+                <a:latin typeface="Times New Roman" panose="02020603050405020304" pitchFamily="18" charset="0"/>
                 <a:ea typeface="David CLM" pitchFamily="2"/>
-                <a:cs typeface="Liberation Sans" pitchFamily="34"/>
+                <a:cs typeface="Times New Roman" panose="02020603050405020304" pitchFamily="18" charset="0"/>
               </a:rPr>
               <a:t>i,j</a:t>
             </a:r>
@@ -21654,9 +21654,9 @@
                 <a:solidFill>
                   <a:srgbClr val="0066FF"/>
                 </a:solidFill>
-                <a:latin typeface="Liberation Sans" pitchFamily="34"/>
+                <a:latin typeface="Times New Roman" panose="02020603050405020304" pitchFamily="18" charset="0"/>
                 <a:ea typeface="David CLM" pitchFamily="2"/>
-                <a:cs typeface="Liberation Sans" pitchFamily="34"/>
+                <a:cs typeface="Times New Roman" panose="02020603050405020304" pitchFamily="18" charset="0"/>
               </a:rPr>
               <a:t>) * (1/u</a:t>
             </a:r>
@@ -21668,9 +21668,9 @@
                 <a:solidFill>
                   <a:srgbClr val="0066FF"/>
                 </a:solidFill>
-                <a:latin typeface="Liberation Sans" pitchFamily="34"/>
+                <a:latin typeface="Times New Roman" panose="02020603050405020304" pitchFamily="18" charset="0"/>
                 <a:ea typeface="David CLM" pitchFamily="2"/>
-                <a:cs typeface="Liberation Sans" pitchFamily="34"/>
+                <a:cs typeface="Times New Roman" panose="02020603050405020304" pitchFamily="18" charset="0"/>
               </a:rPr>
               <a:t>i</a:t>
             </a:r>
@@ -21682,9 +21682,9 @@
                 <a:solidFill>
                   <a:srgbClr val="0066FF"/>
                 </a:solidFill>
-                <a:latin typeface="Liberation Sans" pitchFamily="34"/>
+                <a:latin typeface="Times New Roman" panose="02020603050405020304" pitchFamily="18" charset="0"/>
                 <a:ea typeface="David CLM" pitchFamily="2"/>
-                <a:cs typeface="Liberation Sans" pitchFamily="34"/>
+                <a:cs typeface="Times New Roman" panose="02020603050405020304" pitchFamily="18" charset="0"/>
               </a:rPr>
               <a:t>(d))</a:t>
             </a:r>
@@ -21711,9 +21711,9 @@
                 <a:solidFill>
                   <a:srgbClr val="0066FF"/>
                 </a:solidFill>
-                <a:latin typeface="Liberation Sans" pitchFamily="34"/>
+                <a:latin typeface="Times New Roman" panose="02020603050405020304" pitchFamily="18" charset="0"/>
                 <a:ea typeface="David CLM" pitchFamily="2"/>
-                <a:cs typeface="Liberation Sans" pitchFamily="34"/>
+                <a:cs typeface="Times New Roman" panose="02020603050405020304" pitchFamily="18" charset="0"/>
               </a:rPr>
               <a:t>                = (C/n) * u</a:t>
             </a:r>
@@ -21725,9 +21725,9 @@
                 <a:solidFill>
                   <a:srgbClr val="0066FF"/>
                 </a:solidFill>
-                <a:latin typeface="Liberation Sans" pitchFamily="34"/>
+                <a:latin typeface="Times New Roman" panose="02020603050405020304" pitchFamily="18" charset="0"/>
                 <a:ea typeface="David CLM" pitchFamily="2"/>
-                <a:cs typeface="Liberation Sans" pitchFamily="34"/>
+                <a:cs typeface="Times New Roman" panose="02020603050405020304" pitchFamily="18" charset="0"/>
               </a:rPr>
               <a:t>i</a:t>
             </a:r>
@@ -21739,9 +21739,9 @@
                 <a:solidFill>
                   <a:srgbClr val="0066FF"/>
                 </a:solidFill>
-                <a:latin typeface="Liberation Sans" pitchFamily="34"/>
+                <a:latin typeface="Times New Roman" panose="02020603050405020304" pitchFamily="18" charset="0"/>
                 <a:ea typeface="David CLM" pitchFamily="2"/>
-                <a:cs typeface="Liberation Sans" pitchFamily="34"/>
+                <a:cs typeface="Times New Roman" panose="02020603050405020304" pitchFamily="18" charset="0"/>
               </a:rPr>
               <a:t>(d)              * (1/u</a:t>
             </a:r>
@@ -21753,9 +21753,9 @@
                 <a:solidFill>
                   <a:srgbClr val="0066FF"/>
                 </a:solidFill>
-                <a:latin typeface="Liberation Sans" pitchFamily="34"/>
+                <a:latin typeface="Times New Roman" panose="02020603050405020304" pitchFamily="18" charset="0"/>
                 <a:ea typeface="David CLM" pitchFamily="2"/>
-                <a:cs typeface="Liberation Sans" pitchFamily="34"/>
+                <a:cs typeface="Times New Roman" panose="02020603050405020304" pitchFamily="18" charset="0"/>
               </a:rPr>
               <a:t>i</a:t>
             </a:r>
@@ -21767,9 +21767,9 @@
                 <a:solidFill>
                   <a:srgbClr val="0066FF"/>
                 </a:solidFill>
-                <a:latin typeface="Liberation Sans" pitchFamily="34"/>
+                <a:latin typeface="Times New Roman" panose="02020603050405020304" pitchFamily="18" charset="0"/>
                 <a:ea typeface="David CLM" pitchFamily="2"/>
-                <a:cs typeface="Liberation Sans" pitchFamily="34"/>
+                <a:cs typeface="Times New Roman" panose="02020603050405020304" pitchFamily="18" charset="0"/>
               </a:rPr>
               <a:t>(d))  = C/n.</a:t>
             </a:r>
@@ -21867,11 +21867,11 @@
                 <a:solidFill>
                   <a:srgbClr val="00CC00"/>
                 </a:solidFill>
-                <a:latin typeface="Liberation Sans" pitchFamily="34"/>
+                <a:latin typeface="Times New Roman" panose="02020603050405020304" pitchFamily="18" charset="0"/>
                 <a:ea typeface="David CLM" pitchFamily="2"/>
-                <a:cs typeface="Liberation Sans" pitchFamily="34"/>
-              </a:rPr>
-              <a:t>Sum[i]d</a:t>
+                <a:cs typeface="Times New Roman" panose="02020603050405020304" pitchFamily="18" charset="0"/>
+              </a:rPr>
+              <a:t>Sum[ i ]d</a:t>
             </a:r>
             <a:r>
               <a:rPr lang="en-US" sz="3600" b="0" i="0" u="none" strike="noStrike" kern="1200" cap="none" baseline="-8000">
@@ -21881,9 +21881,9 @@
                 <a:solidFill>
                   <a:srgbClr val="00CC00"/>
                 </a:solidFill>
-                <a:latin typeface="Liberation Sans" pitchFamily="34"/>
+                <a:latin typeface="Times New Roman" panose="02020603050405020304" pitchFamily="18" charset="0"/>
                 <a:ea typeface="David CLM" pitchFamily="2"/>
-                <a:cs typeface="Liberation Sans" pitchFamily="34"/>
+                <a:cs typeface="Times New Roman" panose="02020603050405020304" pitchFamily="18" charset="0"/>
               </a:rPr>
               <a:t>i,j</a:t>
             </a:r>
@@ -21895,9 +21895,9 @@
                 <a:solidFill>
                   <a:srgbClr val="00CC00"/>
                 </a:solidFill>
-                <a:latin typeface="Liberation Sans" pitchFamily="34"/>
+                <a:latin typeface="Times New Roman" panose="02020603050405020304" pitchFamily="18" charset="0"/>
                 <a:ea typeface="David CLM" pitchFamily="2"/>
-                <a:cs typeface="Liberation Sans" pitchFamily="34"/>
+                <a:cs typeface="Times New Roman" panose="02020603050405020304" pitchFamily="18" charset="0"/>
               </a:rPr>
               <a:t> = (C/n) * (d</a:t>
             </a:r>
@@ -21909,9 +21909,9 @@
                 <a:solidFill>
                   <a:srgbClr val="00CC00"/>
                 </a:solidFill>
-                <a:latin typeface="Liberation Sans" pitchFamily="34"/>
+                <a:latin typeface="Times New Roman" panose="02020603050405020304" pitchFamily="18" charset="0"/>
                 <a:ea typeface="David CLM" pitchFamily="2"/>
-                <a:cs typeface="Liberation Sans" pitchFamily="34"/>
+                <a:cs typeface="Times New Roman" panose="02020603050405020304" pitchFamily="18" charset="0"/>
               </a:rPr>
               <a:t>j</a:t>
             </a:r>
@@ -21923,9 +21923,9 @@
                 <a:solidFill>
                   <a:srgbClr val="00CC00"/>
                 </a:solidFill>
-                <a:latin typeface="Liberation Sans" pitchFamily="34"/>
+                <a:latin typeface="Times New Roman" panose="02020603050405020304" pitchFamily="18" charset="0"/>
                 <a:ea typeface="David CLM" pitchFamily="2"/>
-                <a:cs typeface="Liberation Sans" pitchFamily="34"/>
+                <a:cs typeface="Times New Roman" panose="02020603050405020304" pitchFamily="18" charset="0"/>
               </a:rPr>
               <a:t>) * (Sum[i] u</a:t>
             </a:r>
@@ -21937,9 +21937,9 @@
                 <a:solidFill>
                   <a:srgbClr val="00CC00"/>
                 </a:solidFill>
-                <a:latin typeface="Liberation Sans" pitchFamily="34"/>
+                <a:latin typeface="Times New Roman" panose="02020603050405020304" pitchFamily="18" charset="0"/>
                 <a:ea typeface="David CLM" pitchFamily="2"/>
-                <a:cs typeface="Liberation Sans" pitchFamily="34"/>
+                <a:cs typeface="Times New Roman" panose="02020603050405020304" pitchFamily="18" charset="0"/>
               </a:rPr>
               <a:t>i,j</a:t>
             </a:r>
@@ -21951,9 +21951,9 @@
                 <a:solidFill>
                   <a:srgbClr val="00CC00"/>
                 </a:solidFill>
-                <a:latin typeface="Liberation Sans" pitchFamily="34"/>
+                <a:latin typeface="Times New Roman" panose="02020603050405020304" pitchFamily="18" charset="0"/>
                 <a:ea typeface="David CLM" pitchFamily="2"/>
-                <a:cs typeface="Liberation Sans" pitchFamily="34"/>
+                <a:cs typeface="Times New Roman" panose="02020603050405020304" pitchFamily="18" charset="0"/>
               </a:rPr>
               <a:t>/u</a:t>
             </a:r>
@@ -21965,9 +21965,9 @@
                 <a:solidFill>
                   <a:srgbClr val="00CC00"/>
                 </a:solidFill>
-                <a:latin typeface="Liberation Sans" pitchFamily="34"/>
+                <a:latin typeface="Times New Roman" panose="02020603050405020304" pitchFamily="18" charset="0"/>
                 <a:ea typeface="David CLM" pitchFamily="2"/>
-                <a:cs typeface="Liberation Sans" pitchFamily="34"/>
+                <a:cs typeface="Times New Roman" panose="02020603050405020304" pitchFamily="18" charset="0"/>
               </a:rPr>
               <a:t>i</a:t>
             </a:r>
@@ -21979,9 +21979,9 @@
                 <a:solidFill>
                   <a:srgbClr val="00CC00"/>
                 </a:solidFill>
-                <a:latin typeface="Liberation Sans" pitchFamily="34"/>
+                <a:latin typeface="Times New Roman" panose="02020603050405020304" pitchFamily="18" charset="0"/>
                 <a:ea typeface="David CLM" pitchFamily="2"/>
-                <a:cs typeface="Liberation Sans" pitchFamily="34"/>
+                <a:cs typeface="Times New Roman" panose="02020603050405020304" pitchFamily="18" charset="0"/>
               </a:rPr>
               <a:t>(d))</a:t>
             </a:r>
@@ -22008,9 +22008,9 @@
                 <a:solidFill>
                   <a:srgbClr val="00CC00"/>
                 </a:solidFill>
-                <a:latin typeface="Liberation Sans" pitchFamily="34"/>
+                <a:latin typeface="Times New Roman" panose="02020603050405020304" pitchFamily="18" charset="0"/>
                 <a:ea typeface="David CLM" pitchFamily="2"/>
-                <a:cs typeface="Liberation Sans" pitchFamily="34"/>
+                <a:cs typeface="Times New Roman" panose="02020603050405020304" pitchFamily="18" charset="0"/>
               </a:rPr>
               <a:t>               = (C/n) * (d</a:t>
             </a:r>
@@ -22022,9 +22022,9 @@
                 <a:solidFill>
                   <a:srgbClr val="00CC00"/>
                 </a:solidFill>
-                <a:latin typeface="Liberation Sans" pitchFamily="34"/>
+                <a:latin typeface="Times New Roman" panose="02020603050405020304" pitchFamily="18" charset="0"/>
                 <a:ea typeface="David CLM" pitchFamily="2"/>
-                <a:cs typeface="Liberation Sans" pitchFamily="34"/>
+                <a:cs typeface="Times New Roman" panose="02020603050405020304" pitchFamily="18" charset="0"/>
               </a:rPr>
               <a:t>j</a:t>
             </a:r>
@@ -22036,9 +22036,9 @@
                 <a:solidFill>
                   <a:srgbClr val="00CC00"/>
                 </a:solidFill>
-                <a:latin typeface="Liberation Sans" pitchFamily="34"/>
+                <a:latin typeface="Times New Roman" panose="02020603050405020304" pitchFamily="18" charset="0"/>
                 <a:ea typeface="David CLM" pitchFamily="2"/>
-                <a:cs typeface="Liberation Sans" pitchFamily="34"/>
+                <a:cs typeface="Times New Roman" panose="02020603050405020304" pitchFamily="18" charset="0"/>
               </a:rPr>
               <a:t>) * Z</a:t>
             </a:r>
@@ -22065,11 +22065,11 @@
                 <a:solidFill>
                   <a:srgbClr val="00CC00"/>
                 </a:solidFill>
-                <a:latin typeface="Liberation Sans" pitchFamily="34"/>
+                <a:latin typeface="Times New Roman" panose="02020603050405020304" pitchFamily="18" charset="0"/>
                 <a:ea typeface="David CLM" pitchFamily="2"/>
-                <a:cs typeface="Liberation Sans" pitchFamily="34"/>
-              </a:rPr>
-              <a:t>Sum[i,j]d</a:t>
+                <a:cs typeface="Times New Roman" panose="02020603050405020304" pitchFamily="18" charset="0"/>
+              </a:rPr>
+              <a:t>Sum[ i,j ]d</a:t>
             </a:r>
             <a:r>
               <a:rPr lang="en-US" sz="3600" b="0" i="0" u="none" strike="noStrike" kern="1200" cap="none" baseline="-8000">
@@ -22079,9 +22079,9 @@
                 <a:solidFill>
                   <a:srgbClr val="00CC00"/>
                 </a:solidFill>
-                <a:latin typeface="Liberation Sans" pitchFamily="34"/>
+                <a:latin typeface="Times New Roman" panose="02020603050405020304" pitchFamily="18" charset="0"/>
                 <a:ea typeface="David CLM" pitchFamily="2"/>
-                <a:cs typeface="Liberation Sans" pitchFamily="34"/>
+                <a:cs typeface="Times New Roman" panose="02020603050405020304" pitchFamily="18" charset="0"/>
               </a:rPr>
               <a:t>i,j</a:t>
             </a:r>
@@ -22093,9 +22093,9 @@
                 <a:solidFill>
                   <a:srgbClr val="00CC00"/>
                 </a:solidFill>
-                <a:latin typeface="Liberation Sans" pitchFamily="34"/>
+                <a:latin typeface="Times New Roman" panose="02020603050405020304" pitchFamily="18" charset="0"/>
                 <a:ea typeface="David CLM" pitchFamily="2"/>
-                <a:cs typeface="Liberation Sans" pitchFamily="34"/>
+                <a:cs typeface="Times New Roman" panose="02020603050405020304" pitchFamily="18" charset="0"/>
               </a:rPr>
               <a:t>  = (C/n) * (C) * Z</a:t>
             </a:r>
@@ -22151,11 +22151,11 @@
                 <a:solidFill>
                   <a:srgbClr val="00CC00"/>
                 </a:solidFill>
-                <a:latin typeface="Liberation Sans" pitchFamily="34"/>
+                <a:latin typeface="Times New Roman" panose="02020603050405020304" pitchFamily="18" charset="0"/>
                 <a:ea typeface="David CLM" pitchFamily="2"/>
-                <a:cs typeface="Liberation Sans" pitchFamily="34"/>
-              </a:rPr>
-              <a:t>Sum[i,j]d</a:t>
+                <a:cs typeface="Times New Roman" panose="02020603050405020304" pitchFamily="18" charset="0"/>
+              </a:rPr>
+              <a:t>Sum[ i,j ]d</a:t>
             </a:r>
             <a:r>
               <a:rPr lang="en-US" sz="3600" b="0" i="0" u="none" strike="noStrike" kern="1200" cap="none" baseline="-8000">
@@ -22165,9 +22165,9 @@
                 <a:solidFill>
                   <a:srgbClr val="00CC00"/>
                 </a:solidFill>
-                <a:latin typeface="Liberation Sans" pitchFamily="34"/>
+                <a:latin typeface="Times New Roman" panose="02020603050405020304" pitchFamily="18" charset="0"/>
                 <a:ea typeface="David CLM" pitchFamily="2"/>
-                <a:cs typeface="Liberation Sans" pitchFamily="34"/>
+                <a:cs typeface="Times New Roman" panose="02020603050405020304" pitchFamily="18" charset="0"/>
               </a:rPr>
               <a:t>i,j</a:t>
             </a:r>
@@ -22179,9 +22179,9 @@
                 <a:solidFill>
                   <a:srgbClr val="00CC00"/>
                 </a:solidFill>
-                <a:latin typeface="Liberation Sans" pitchFamily="34"/>
+                <a:latin typeface="Times New Roman" panose="02020603050405020304" pitchFamily="18" charset="0"/>
                 <a:ea typeface="David CLM" pitchFamily="2"/>
-                <a:cs typeface="Liberation Sans" pitchFamily="34"/>
+                <a:cs typeface="Times New Roman" panose="02020603050405020304" pitchFamily="18" charset="0"/>
               </a:rPr>
               <a:t> = Sum[i](C/n)</a:t>
             </a:r>
@@ -22193,9 +22193,9 @@
                 <a:solidFill>
                   <a:srgbClr val="00CC00"/>
                 </a:solidFill>
-                <a:latin typeface="Liberation Sans" pitchFamily="34"/>
+                <a:latin typeface="Times New Roman" panose="02020603050405020304" pitchFamily="18" charset="0"/>
                 <a:ea typeface="David CLM" pitchFamily="2"/>
-                <a:cs typeface="Liberation Sans" pitchFamily="34"/>
+                <a:cs typeface="Times New Roman" panose="02020603050405020304" pitchFamily="18" charset="0"/>
               </a:rPr>
               <a:t> </a:t>
             </a:r>
@@ -22207,9 +22207,9 @@
                 <a:solidFill>
                   <a:srgbClr val="00CC00"/>
                 </a:solidFill>
-                <a:latin typeface="Liberation Sans" pitchFamily="34"/>
+                <a:latin typeface="Times New Roman" panose="02020603050405020304" pitchFamily="18" charset="0"/>
                 <a:ea typeface="David CLM" pitchFamily="2"/>
-                <a:cs typeface="Liberation Sans" pitchFamily="34"/>
+                <a:cs typeface="Times New Roman" panose="02020603050405020304" pitchFamily="18" charset="0"/>
               </a:rPr>
               <a:t>=</a:t>
             </a:r>
@@ -22221,9 +22221,9 @@
                 <a:solidFill>
                   <a:srgbClr val="00CC00"/>
                 </a:solidFill>
-                <a:latin typeface="Liberation Sans" pitchFamily="34"/>
+                <a:latin typeface="Times New Roman" panose="02020603050405020304" pitchFamily="18" charset="0"/>
                 <a:ea typeface="David CLM" pitchFamily="2"/>
-                <a:cs typeface="Liberation Sans" pitchFamily="34"/>
+                <a:cs typeface="Times New Roman" panose="02020603050405020304" pitchFamily="18" charset="0"/>
               </a:rPr>
               <a:t> C    –&gt;   Z = n/C.</a:t>
             </a:r>
@@ -22279,11 +22279,11 @@
                 <a:solidFill>
                   <a:srgbClr val="00CC00"/>
                 </a:solidFill>
-                <a:latin typeface="Liberation Sans" pitchFamily="34"/>
+                <a:latin typeface="Times New Roman" panose="02020603050405020304" pitchFamily="18" charset="0"/>
                 <a:ea typeface="David CLM" pitchFamily="2"/>
-                <a:cs typeface="Liberation Sans" pitchFamily="34"/>
-              </a:rPr>
-              <a:t>Sum[i]d</a:t>
+                <a:cs typeface="Times New Roman" panose="02020603050405020304" pitchFamily="18" charset="0"/>
+              </a:rPr>
+              <a:t>Sum[ i ]d</a:t>
             </a:r>
             <a:r>
               <a:rPr lang="en-US" sz="3600" b="0" i="0" u="none" strike="noStrike" kern="1200" cap="none" baseline="-8000">
@@ -22293,9 +22293,9 @@
                 <a:solidFill>
                   <a:srgbClr val="00CC00"/>
                 </a:solidFill>
-                <a:latin typeface="Liberation Sans" pitchFamily="34"/>
+                <a:latin typeface="Times New Roman" panose="02020603050405020304" pitchFamily="18" charset="0"/>
                 <a:ea typeface="David CLM" pitchFamily="2"/>
-                <a:cs typeface="Liberation Sans" pitchFamily="34"/>
+                <a:cs typeface="Times New Roman" panose="02020603050405020304" pitchFamily="18" charset="0"/>
               </a:rPr>
               <a:t>i,j</a:t>
             </a:r>
@@ -22307,9 +22307,9 @@
                 <a:solidFill>
                   <a:srgbClr val="00CC00"/>
                 </a:solidFill>
-                <a:latin typeface="Liberation Sans" pitchFamily="34"/>
+                <a:latin typeface="Times New Roman" panose="02020603050405020304" pitchFamily="18" charset="0"/>
                 <a:ea typeface="David CLM" pitchFamily="2"/>
-                <a:cs typeface="Liberation Sans" pitchFamily="34"/>
+                <a:cs typeface="Times New Roman" panose="02020603050405020304" pitchFamily="18" charset="0"/>
               </a:rPr>
               <a:t> = d</a:t>
             </a:r>
@@ -22321,9 +22321,9 @@
                 <a:solidFill>
                   <a:srgbClr val="00CC00"/>
                 </a:solidFill>
-                <a:latin typeface="Liberation Sans" pitchFamily="34"/>
+                <a:latin typeface="Times New Roman" panose="02020603050405020304" pitchFamily="18" charset="0"/>
                 <a:ea typeface="David CLM" pitchFamily="2"/>
-                <a:cs typeface="Liberation Sans" pitchFamily="34"/>
+                <a:cs typeface="Times New Roman" panose="02020603050405020304" pitchFamily="18" charset="0"/>
               </a:rPr>
               <a:t>j</a:t>
             </a:r>
@@ -22335,11 +22335,25 @@
                 <a:solidFill>
                   <a:srgbClr val="00CC00"/>
                 </a:solidFill>
-                <a:latin typeface="Liberation Sans" pitchFamily="34"/>
+                <a:latin typeface="Times New Roman" panose="02020603050405020304" pitchFamily="18" charset="0"/>
                 <a:ea typeface="David CLM" pitchFamily="2"/>
-                <a:cs typeface="Liberation Sans" pitchFamily="34"/>
-              </a:rPr>
-              <a:t>.     ***</a:t>
+                <a:cs typeface="Times New Roman" panose="02020603050405020304" pitchFamily="18" charset="0"/>
+              </a:rPr>
+              <a:t>.     </a:t>
+            </a:r>
+            <a:r>
+              <a:rPr lang="en-US" sz="3600" b="0" i="0" u="none" strike="noStrike" kern="1200" cap="none">
+                <a:ln>
+                  <a:noFill/>
+                </a:ln>
+                <a:solidFill>
+                  <a:srgbClr val="00CC00"/>
+                </a:solidFill>
+                <a:latin typeface="Liberation Sans" pitchFamily="34"/>
+                <a:ea typeface="David CLM" pitchFamily="2"/>
+                <a:cs typeface="Liberation Sans" pitchFamily="34"/>
+              </a:rPr>
+              <a:t>***</a:t>
             </a:r>
           </a:p>
         </p:txBody>
@@ -22643,9 +22657,9 @@
                 <a:solidFill>
                   <a:srgbClr val="0066FF"/>
                 </a:solidFill>
-                <a:latin typeface="Liberation Sans" pitchFamily="34"/>
-                <a:ea typeface="Noto Sans CJK SC Regular" pitchFamily="2"/>
-                <a:cs typeface="Liberation Sans" pitchFamily="34"/>
+                <a:latin typeface="Times New Roman" panose="02020603050405020304" pitchFamily="18" charset="0"/>
+                <a:ea typeface="Noto Sans CJK SC Regular" pitchFamily="2"/>
+                <a:cs typeface="Times New Roman" panose="02020603050405020304" pitchFamily="18" charset="0"/>
               </a:rPr>
               <a:t>i</a:t>
             </a:r>
@@ -22755,9 +22769,9 @@
                 <a:solidFill>
                   <a:srgbClr val="0066FF"/>
                 </a:solidFill>
-                <a:latin typeface="Liberation Sans" pitchFamily="34"/>
-                <a:ea typeface="Noto Sans CJK SC Regular" pitchFamily="2"/>
-                <a:cs typeface="Liberation Sans" pitchFamily="34"/>
+                <a:latin typeface="Times New Roman" panose="02020603050405020304" pitchFamily="18" charset="0"/>
+                <a:ea typeface="Noto Sans CJK SC Regular" pitchFamily="2"/>
+                <a:cs typeface="Times New Roman" panose="02020603050405020304" pitchFamily="18" charset="0"/>
               </a:rPr>
               <a:t>u</a:t>
             </a:r>
@@ -22769,9 +22783,9 @@
                 <a:solidFill>
                   <a:srgbClr val="0066FF"/>
                 </a:solidFill>
-                <a:latin typeface="Liberation Sans" pitchFamily="34"/>
-                <a:ea typeface="Noto Sans CJK SC Regular" pitchFamily="2"/>
-                <a:cs typeface="Liberation Sans" pitchFamily="34"/>
+                <a:latin typeface="Times New Roman" panose="02020603050405020304" pitchFamily="18" charset="0"/>
+                <a:ea typeface="Noto Sans CJK SC Regular" pitchFamily="2"/>
+                <a:cs typeface="Times New Roman" panose="02020603050405020304" pitchFamily="18" charset="0"/>
               </a:rPr>
               <a:t>i,j</a:t>
             </a:r>
@@ -22783,11 +22797,25 @@
                 <a:solidFill>
                   <a:srgbClr val="0066FF"/>
                 </a:solidFill>
-                <a:latin typeface="Liberation Sans" pitchFamily="34"/>
-                <a:ea typeface="Noto Sans CJK SC Regular" pitchFamily="2"/>
-                <a:cs typeface="Liberation Sans" pitchFamily="34"/>
-              </a:rPr>
-              <a:t> אמיתיים.</a:t>
+                <a:latin typeface="Times New Roman" panose="02020603050405020304" pitchFamily="18" charset="0"/>
+                <a:ea typeface="Noto Sans CJK SC Regular" pitchFamily="2"/>
+                <a:cs typeface="Times New Roman" panose="02020603050405020304" pitchFamily="18" charset="0"/>
+              </a:rPr>
+              <a:t> </a:t>
+            </a:r>
+            <a:r>
+              <a:rPr lang="he-IL" sz="4000" b="0" i="0" u="none" strike="noStrike" kern="1200" cap="none">
+                <a:ln>
+                  <a:noFill/>
+                </a:ln>
+                <a:solidFill>
+                  <a:srgbClr val="0066FF"/>
+                </a:solidFill>
+                <a:latin typeface="Liberation Sans" pitchFamily="34"/>
+                <a:ea typeface="Noto Sans CJK SC Regular" pitchFamily="2"/>
+                <a:cs typeface="Liberation Sans" pitchFamily="34"/>
+              </a:rPr>
+              <a:t>אמיתיים.</a:t>
             </a:r>
           </a:p>
           <a:p>
@@ -27844,8 +27872,8 @@
         </p:nvSpPr>
         <p:spPr>
           <a:xfrm>
-            <a:off x="1634312" y="1005840"/>
-            <a:ext cx="8241208" cy="3040084"/>
+            <a:off x="1553457" y="1005840"/>
+            <a:ext cx="8322063" cy="3046816"/>
           </a:xfrm>
           <a:prstGeom prst="rect">
             <a:avLst/>
@@ -27892,9 +27920,9 @@
                 <a:ln>
                   <a:noFill/>
                 </a:ln>
-                <a:latin typeface="Liberation Sans" pitchFamily="34"/>
-                <a:ea typeface="Noto Sans CJK SC Regular" pitchFamily="2"/>
-                <a:cs typeface="Liberation Sans" pitchFamily="34"/>
+                <a:latin typeface="Times New Roman" panose="02020603050405020304" pitchFamily="18" charset="0"/>
+                <a:ea typeface="Noto Sans CJK SC Regular" pitchFamily="2"/>
+                <a:cs typeface="Times New Roman" panose="02020603050405020304" pitchFamily="18" charset="0"/>
               </a:rPr>
               <a:t>C</a:t>
             </a:r>
@@ -27937,9 +27965,9 @@
                 <a:solidFill>
                   <a:srgbClr val="00CC00"/>
                 </a:solidFill>
-                <a:latin typeface="Liberation Sans" pitchFamily="34"/>
-                <a:ea typeface="Noto Sans CJK SC Regular" pitchFamily="2"/>
-                <a:cs typeface="Liberation Sans" pitchFamily="34"/>
+                <a:latin typeface="Times New Roman" panose="02020603050405020304" pitchFamily="18" charset="0"/>
+                <a:ea typeface="Noto Sans CJK SC Regular" pitchFamily="2"/>
+                <a:cs typeface="Times New Roman" panose="02020603050405020304" pitchFamily="18" charset="0"/>
               </a:rPr>
               <a:t>1,...,m </a:t>
             </a:r>
@@ -27951,9 +27979,9 @@
                 <a:solidFill>
                   <a:srgbClr val="00CC00"/>
                 </a:solidFill>
-                <a:latin typeface="Liberation Sans" pitchFamily="34"/>
-                <a:ea typeface="Noto Sans CJK SC Regular" pitchFamily="2"/>
-                <a:cs typeface="Liberation Sans" pitchFamily="34"/>
+                <a:latin typeface="Times New Roman" panose="02020603050405020304" pitchFamily="18" charset="0"/>
+                <a:ea typeface="Noto Sans CJK SC Regular" pitchFamily="2"/>
+                <a:cs typeface="Times New Roman" panose="02020603050405020304" pitchFamily="18" charset="0"/>
               </a:rPr>
               <a:t> </a:t>
             </a:r>
@@ -28074,9 +28102,9 @@
                 <a:solidFill>
                   <a:srgbClr val="0066FF"/>
                 </a:solidFill>
-                <a:latin typeface="Liberation Sans" pitchFamily="34"/>
-                <a:ea typeface="Noto Sans CJK SC Regular" pitchFamily="2"/>
-                <a:cs typeface="Liberation Sans" pitchFamily="34"/>
+                <a:latin typeface="Times New Roman" panose="02020603050405020304" pitchFamily="18" charset="0"/>
+                <a:ea typeface="Noto Sans CJK SC Regular" pitchFamily="2"/>
+                <a:cs typeface="Times New Roman" panose="02020603050405020304" pitchFamily="18" charset="0"/>
               </a:rPr>
               <a:t>1,...,n</a:t>
             </a:r>
@@ -28119,9 +28147,9 @@
                 <a:solidFill>
                   <a:srgbClr val="00FFFF"/>
                 </a:solidFill>
-                <a:latin typeface="Liberation Sans" pitchFamily="34"/>
-                <a:ea typeface="Noto Sans CJK SC Regular" pitchFamily="2"/>
-                <a:cs typeface="Liberation Sans" pitchFamily="34"/>
+                <a:latin typeface="Times New Roman" panose="02020603050405020304" pitchFamily="18" charset="0"/>
+                <a:ea typeface="Noto Sans CJK SC Regular" pitchFamily="2"/>
+                <a:cs typeface="Times New Roman" panose="02020603050405020304" pitchFamily="18" charset="0"/>
               </a:rPr>
               <a:t>i</a:t>
             </a:r>
@@ -28175,9 +28203,9 @@
                 <a:solidFill>
                   <a:srgbClr val="00FFFF"/>
                 </a:solidFill>
-                <a:latin typeface="Liberation Sans" pitchFamily="34"/>
-                <a:ea typeface="Noto Sans CJK SC Regular" pitchFamily="2"/>
-                <a:cs typeface="Liberation Sans" pitchFamily="34"/>
+                <a:latin typeface="Times New Roman" panose="02020603050405020304" pitchFamily="18" charset="0"/>
+                <a:ea typeface="Noto Sans CJK SC Regular" pitchFamily="2"/>
+                <a:cs typeface="Times New Roman" panose="02020603050405020304" pitchFamily="18" charset="0"/>
               </a:rPr>
               <a:t>j</a:t>
             </a:r>
@@ -28231,9 +28259,9 @@
                 <a:solidFill>
                   <a:srgbClr val="00FFFF"/>
                 </a:solidFill>
-                <a:latin typeface="Liberation Sans" pitchFamily="34"/>
+                <a:latin typeface="Times New Roman" panose="02020603050405020304" pitchFamily="18" charset="0"/>
                 <a:ea typeface="David CLM" pitchFamily="2"/>
-                <a:cs typeface="Liberation Sans" pitchFamily="34"/>
+                <a:cs typeface="Times New Roman" panose="02020603050405020304" pitchFamily="18" charset="0"/>
               </a:rPr>
               <a:t>u</a:t>
             </a:r>
@@ -28245,9 +28273,9 @@
                 <a:solidFill>
                   <a:srgbClr val="00FFFF"/>
                 </a:solidFill>
-                <a:latin typeface="Liberation Sans" pitchFamily="34"/>
+                <a:latin typeface="Times New Roman" panose="02020603050405020304" pitchFamily="18" charset="0"/>
                 <a:ea typeface="David CLM" pitchFamily="2"/>
-                <a:cs typeface="Liberation Sans" pitchFamily="34"/>
+                <a:cs typeface="Times New Roman" panose="02020603050405020304" pitchFamily="18" charset="0"/>
               </a:rPr>
               <a:t>i,j</a:t>
             </a:r>
@@ -28471,9 +28499,9 @@
                 <a:ln>
                   <a:noFill/>
                 </a:ln>
-                <a:latin typeface="Liberation Sans" pitchFamily="34"/>
-                <a:ea typeface="Noto Sans CJK SC Regular" pitchFamily="2"/>
-                <a:cs typeface="Liberation Sans" pitchFamily="34"/>
+                <a:latin typeface="Times New Roman" panose="02020603050405020304" pitchFamily="18" charset="0"/>
+                <a:ea typeface="Noto Sans CJK SC Regular" pitchFamily="2"/>
+                <a:cs typeface="Times New Roman" panose="02020603050405020304" pitchFamily="18" charset="0"/>
               </a:rPr>
               <a:t>d</a:t>
             </a:r>
@@ -28515,9 +28543,9 @@
                 <a:ln>
                   <a:noFill/>
                 </a:ln>
-                <a:latin typeface="Liberation Sans" pitchFamily="34"/>
-                <a:ea typeface="Noto Sans CJK SC Regular" pitchFamily="2"/>
-                <a:cs typeface="Liberation Sans" pitchFamily="34"/>
+                <a:latin typeface="Times New Roman" panose="02020603050405020304" pitchFamily="18" charset="0"/>
+                <a:ea typeface="Noto Sans CJK SC Regular" pitchFamily="2"/>
+                <a:cs typeface="Times New Roman" panose="02020603050405020304" pitchFamily="18" charset="0"/>
               </a:rPr>
               <a:t>d</a:t>
             </a:r>
@@ -28526,9 +28554,9 @@
                 <a:ln>
                   <a:noFill/>
                 </a:ln>
-                <a:latin typeface="Liberation Sans" pitchFamily="34"/>
-                <a:ea typeface="Noto Sans CJK SC Regular" pitchFamily="2"/>
-                <a:cs typeface="Liberation Sans" pitchFamily="34"/>
+                <a:latin typeface="Times New Roman" panose="02020603050405020304" pitchFamily="18" charset="0"/>
+                <a:ea typeface="Noto Sans CJK SC Regular" pitchFamily="2"/>
+                <a:cs typeface="Times New Roman" panose="02020603050405020304" pitchFamily="18" charset="0"/>
               </a:rPr>
               <a:t>1</a:t>
             </a:r>
@@ -28537,9 +28565,9 @@
                 <a:ln>
                   <a:noFill/>
                 </a:ln>
-                <a:latin typeface="Liberation Sans" pitchFamily="34"/>
-                <a:ea typeface="Noto Sans CJK SC Regular" pitchFamily="2"/>
-                <a:cs typeface="Liberation Sans" pitchFamily="34"/>
+                <a:latin typeface="Times New Roman" panose="02020603050405020304" pitchFamily="18" charset="0"/>
+                <a:ea typeface="Noto Sans CJK SC Regular" pitchFamily="2"/>
+                <a:cs typeface="Times New Roman" panose="02020603050405020304" pitchFamily="18" charset="0"/>
               </a:rPr>
               <a:t>,…,d</a:t>
             </a:r>
@@ -28548,9 +28576,9 @@
                 <a:ln>
                   <a:noFill/>
                 </a:ln>
-                <a:latin typeface="Liberation Sans" pitchFamily="34"/>
-                <a:ea typeface="Noto Sans CJK SC Regular" pitchFamily="2"/>
-                <a:cs typeface="Liberation Sans" pitchFamily="34"/>
+                <a:latin typeface="Times New Roman" panose="02020603050405020304" pitchFamily="18" charset="0"/>
+                <a:ea typeface="Noto Sans CJK SC Regular" pitchFamily="2"/>
+                <a:cs typeface="Times New Roman" panose="02020603050405020304" pitchFamily="18" charset="0"/>
               </a:rPr>
               <a:t>m</a:t>
             </a:r>
@@ -28595,9 +28623,9 @@
                 <a:solidFill>
                   <a:srgbClr val="00CC00"/>
                 </a:solidFill>
-                <a:latin typeface="Liberation Sans" pitchFamily="34"/>
+                <a:latin typeface="Times New Roman" panose="02020603050405020304" pitchFamily="18" charset="0"/>
                 <a:ea typeface="David CLM" pitchFamily="2"/>
-                <a:cs typeface="Liberation Sans" pitchFamily="34"/>
+                <a:cs typeface="Times New Roman" panose="02020603050405020304" pitchFamily="18" charset="0"/>
               </a:rPr>
               <a:t>d</a:t>
             </a:r>
@@ -28609,9 +28637,9 @@
                 <a:solidFill>
                   <a:srgbClr val="00CC00"/>
                 </a:solidFill>
-                <a:latin typeface="Liberation Sans" pitchFamily="34"/>
+                <a:latin typeface="Times New Roman" panose="02020603050405020304" pitchFamily="18" charset="0"/>
                 <a:ea typeface="David CLM" pitchFamily="2"/>
-                <a:cs typeface="Liberation Sans" pitchFamily="34"/>
+                <a:cs typeface="Times New Roman" panose="02020603050405020304" pitchFamily="18" charset="0"/>
               </a:rPr>
               <a:t>1 </a:t>
             </a:r>
@@ -28623,9 +28651,9 @@
                 <a:solidFill>
                   <a:srgbClr val="00CC00"/>
                 </a:solidFill>
-                <a:latin typeface="Liberation Sans" pitchFamily="34"/>
+                <a:latin typeface="Times New Roman" panose="02020603050405020304" pitchFamily="18" charset="0"/>
                 <a:ea typeface="David CLM" pitchFamily="2"/>
-                <a:cs typeface="Liberation Sans" pitchFamily="34"/>
+                <a:cs typeface="Times New Roman" panose="02020603050405020304" pitchFamily="18" charset="0"/>
               </a:rPr>
               <a:t>+ … + d</a:t>
             </a:r>
@@ -28637,9 +28665,9 @@
                 <a:solidFill>
                   <a:srgbClr val="00CC00"/>
                 </a:solidFill>
-                <a:latin typeface="Liberation Sans" pitchFamily="34"/>
+                <a:latin typeface="Times New Roman" panose="02020603050405020304" pitchFamily="18" charset="0"/>
                 <a:ea typeface="David CLM" pitchFamily="2"/>
-                <a:cs typeface="Liberation Sans" pitchFamily="34"/>
+                <a:cs typeface="Times New Roman" panose="02020603050405020304" pitchFamily="18" charset="0"/>
               </a:rPr>
               <a:t>m</a:t>
             </a:r>
@@ -28651,11 +28679,25 @@
                 <a:solidFill>
                   <a:srgbClr val="00CC00"/>
                 </a:solidFill>
-                <a:latin typeface="Liberation Sans" pitchFamily="34"/>
+                <a:latin typeface="Times New Roman" panose="02020603050405020304" pitchFamily="18" charset="0"/>
                 <a:ea typeface="David CLM" pitchFamily="2"/>
-                <a:cs typeface="Liberation Sans" pitchFamily="34"/>
-              </a:rPr>
-              <a:t>=C.</a:t>
+                <a:cs typeface="Times New Roman" panose="02020603050405020304" pitchFamily="18" charset="0"/>
+              </a:rPr>
+              <a:t>=C</a:t>
+            </a:r>
+            <a:r>
+              <a:rPr lang="en-US" sz="4000" b="0" i="0" u="none" strike="noStrike" kern="1200" cap="none">
+                <a:ln>
+                  <a:noFill/>
+                </a:ln>
+                <a:solidFill>
+                  <a:srgbClr val="00CC00"/>
+                </a:solidFill>
+                <a:latin typeface="Liberation Sans" pitchFamily="34"/>
+                <a:ea typeface="David CLM" pitchFamily="2"/>
+                <a:cs typeface="Liberation Sans" pitchFamily="34"/>
+              </a:rPr>
+              <a:t>.</a:t>
             </a:r>
           </a:p>
           <a:p>
@@ -28696,9 +28738,9 @@
                 <a:solidFill>
                   <a:srgbClr val="00FFFF"/>
                 </a:solidFill>
-                <a:latin typeface="Liberation Sans" pitchFamily="34"/>
+                <a:latin typeface="Times New Roman" panose="02020603050405020304" pitchFamily="18" charset="0"/>
                 <a:ea typeface="David CLM" pitchFamily="2"/>
-                <a:cs typeface="Liberation Sans" pitchFamily="34"/>
+                <a:cs typeface="Times New Roman" panose="02020603050405020304" pitchFamily="18" charset="0"/>
               </a:rPr>
               <a:t>i</a:t>
             </a:r>
@@ -28752,9 +28794,9 @@
                 <a:solidFill>
                   <a:srgbClr val="00FFFF"/>
                 </a:solidFill>
-                <a:latin typeface="Liberation Sans" pitchFamily="34"/>
+                <a:latin typeface="Times New Roman" panose="02020603050405020304" pitchFamily="18" charset="0"/>
                 <a:ea typeface="David CLM" pitchFamily="2"/>
-                <a:cs typeface="Liberation Sans" pitchFamily="34"/>
+                <a:cs typeface="Times New Roman" panose="02020603050405020304" pitchFamily="18" charset="0"/>
               </a:rPr>
               <a:t>d</a:t>
             </a:r>
@@ -28811,9 +28853,9 @@
                 <a:solidFill>
                   <a:srgbClr val="00FFFF"/>
                 </a:solidFill>
-                <a:latin typeface="Liberation Sans" pitchFamily="34"/>
+                <a:latin typeface="Times New Roman" panose="02020603050405020304" pitchFamily="18" charset="0"/>
                 <a:ea typeface="David CLM" pitchFamily="2"/>
-                <a:cs typeface="Liberation Sans" pitchFamily="34"/>
+                <a:cs typeface="Times New Roman" panose="02020603050405020304" pitchFamily="18" charset="0"/>
               </a:rPr>
               <a:t>u</a:t>
             </a:r>
@@ -28825,9 +28867,9 @@
                 <a:solidFill>
                   <a:srgbClr val="00FFFF"/>
                 </a:solidFill>
-                <a:latin typeface="Liberation Sans" pitchFamily="34"/>
+                <a:latin typeface="Times New Roman" panose="02020603050405020304" pitchFamily="18" charset="0"/>
                 <a:ea typeface="David CLM" pitchFamily="2"/>
-                <a:cs typeface="Liberation Sans" pitchFamily="34"/>
+                <a:cs typeface="Times New Roman" panose="02020603050405020304" pitchFamily="18" charset="0"/>
               </a:rPr>
               <a:t>i</a:t>
             </a:r>
@@ -28839,9 +28881,9 @@
                 <a:solidFill>
                   <a:srgbClr val="00FFFF"/>
                 </a:solidFill>
-                <a:latin typeface="Liberation Sans" pitchFamily="34"/>
+                <a:latin typeface="Times New Roman" panose="02020603050405020304" pitchFamily="18" charset="0"/>
                 <a:ea typeface="David CLM" pitchFamily="2"/>
-                <a:cs typeface="Liberation Sans" pitchFamily="34"/>
+                <a:cs typeface="Times New Roman" panose="02020603050405020304" pitchFamily="18" charset="0"/>
               </a:rPr>
               <a:t>(d) = Sum[j=1,…,m]  u</a:t>
             </a:r>
@@ -28853,9 +28895,9 @@
                 <a:solidFill>
                   <a:srgbClr val="00FFFF"/>
                 </a:solidFill>
-                <a:latin typeface="Liberation Sans" pitchFamily="34"/>
+                <a:latin typeface="Times New Roman" panose="02020603050405020304" pitchFamily="18" charset="0"/>
                 <a:ea typeface="David CLM" pitchFamily="2"/>
-                <a:cs typeface="Liberation Sans" pitchFamily="34"/>
+                <a:cs typeface="Times New Roman" panose="02020603050405020304" pitchFamily="18" charset="0"/>
               </a:rPr>
               <a:t>i,j  </a:t>
             </a:r>
@@ -28867,9 +28909,9 @@
                 <a:solidFill>
                   <a:srgbClr val="00FFFF"/>
                 </a:solidFill>
-                <a:latin typeface="Liberation Sans" pitchFamily="34"/>
+                <a:latin typeface="Times New Roman" panose="02020603050405020304" pitchFamily="18" charset="0"/>
                 <a:ea typeface="David CLM" pitchFamily="2"/>
-                <a:cs typeface="Liberation Sans" pitchFamily="34"/>
+                <a:cs typeface="Times New Roman" panose="02020603050405020304" pitchFamily="18" charset="0"/>
               </a:rPr>
               <a:t>* </a:t>
             </a:r>
@@ -28881,9 +28923,9 @@
                 <a:solidFill>
                   <a:srgbClr val="00FFFF"/>
                 </a:solidFill>
-                <a:latin typeface="Liberation Sans" pitchFamily="34"/>
+                <a:latin typeface="Times New Roman" panose="02020603050405020304" pitchFamily="18" charset="0"/>
                 <a:ea typeface="David CLM" pitchFamily="2"/>
-                <a:cs typeface="Liberation Sans" pitchFamily="34"/>
+                <a:cs typeface="Times New Roman" panose="02020603050405020304" pitchFamily="18" charset="0"/>
               </a:rPr>
               <a:t> </a:t>
             </a:r>
@@ -28895,9 +28937,9 @@
                 <a:solidFill>
                   <a:srgbClr val="00FFFF"/>
                 </a:solidFill>
-                <a:latin typeface="Liberation Sans" pitchFamily="34"/>
+                <a:latin typeface="Times New Roman" panose="02020603050405020304" pitchFamily="18" charset="0"/>
                 <a:ea typeface="David CLM" pitchFamily="2"/>
-                <a:cs typeface="Liberation Sans" pitchFamily="34"/>
+                <a:cs typeface="Times New Roman" panose="02020603050405020304" pitchFamily="18" charset="0"/>
               </a:rPr>
               <a:t>d</a:t>
             </a:r>
@@ -28909,9 +28951,9 @@
                 <a:solidFill>
                   <a:srgbClr val="00FFFF"/>
                 </a:solidFill>
-                <a:latin typeface="Liberation Sans" pitchFamily="34"/>
+                <a:latin typeface="Times New Roman" panose="02020603050405020304" pitchFamily="18" charset="0"/>
                 <a:ea typeface="David CLM" pitchFamily="2"/>
-                <a:cs typeface="Liberation Sans" pitchFamily="34"/>
+                <a:cs typeface="Times New Roman" panose="02020603050405020304" pitchFamily="18" charset="0"/>
               </a:rPr>
               <a:t>j</a:t>
             </a:r>
@@ -29255,9 +29297,9 @@
                 <a:solidFill>
                   <a:srgbClr val="FF0000"/>
                 </a:solidFill>
-                <a:latin typeface="Liberation Sans" pitchFamily="34"/>
-                <a:ea typeface="Noto Sans CJK SC Regular" pitchFamily="2"/>
-                <a:cs typeface="Liberation Sans" pitchFamily="34"/>
+                <a:latin typeface="Times New Roman" panose="02020603050405020304" pitchFamily="18" charset="0"/>
+                <a:ea typeface="Noto Sans CJK SC Regular" pitchFamily="2"/>
+                <a:cs typeface="Times New Roman" panose="02020603050405020304" pitchFamily="18" charset="0"/>
               </a:rPr>
               <a:t>u</a:t>
             </a:r>
@@ -29269,9 +29311,9 @@
                 <a:solidFill>
                   <a:srgbClr val="FF0000"/>
                 </a:solidFill>
-                <a:latin typeface="Liberation Sans" pitchFamily="34"/>
-                <a:ea typeface="Noto Sans CJK SC Regular" pitchFamily="2"/>
-                <a:cs typeface="Liberation Sans" pitchFamily="34"/>
+                <a:latin typeface="Times New Roman" panose="02020603050405020304" pitchFamily="18" charset="0"/>
+                <a:ea typeface="Noto Sans CJK SC Regular" pitchFamily="2"/>
+                <a:cs typeface="Times New Roman" panose="02020603050405020304" pitchFamily="18" charset="0"/>
               </a:rPr>
               <a:t>i</a:t>
             </a:r>
@@ -29283,9 +29325,9 @@
                 <a:solidFill>
                   <a:srgbClr val="FF0000"/>
                 </a:solidFill>
-                <a:latin typeface="Liberation Sans" pitchFamily="34"/>
-                <a:ea typeface="Noto Sans CJK SC Regular" pitchFamily="2"/>
-                <a:cs typeface="Liberation Sans" pitchFamily="34"/>
+                <a:latin typeface="Times New Roman" panose="02020603050405020304" pitchFamily="18" charset="0"/>
+                <a:ea typeface="Noto Sans CJK SC Regular" pitchFamily="2"/>
+                <a:cs typeface="Times New Roman" panose="02020603050405020304" pitchFamily="18" charset="0"/>
               </a:rPr>
               <a:t>(d) </a:t>
             </a:r>
@@ -29297,9 +29339,9 @@
                 <a:solidFill>
                   <a:srgbClr val="FF0000"/>
                 </a:solidFill>
-                <a:latin typeface="Liberation Sans" pitchFamily="34"/>
-                <a:ea typeface="Noto Sans CJK SC Regular" pitchFamily="2"/>
-                <a:cs typeface="Liberation Sans" pitchFamily="34"/>
+                <a:latin typeface="Times New Roman" panose="02020603050405020304" pitchFamily="18" charset="0"/>
+                <a:ea typeface="Noto Sans CJK SC Regular" pitchFamily="2"/>
+                <a:cs typeface="Times New Roman" panose="02020603050405020304" pitchFamily="18" charset="0"/>
               </a:rPr>
               <a:t>≥ C/n</a:t>
             </a:r>
@@ -29857,9 +29899,9 @@
                 <a:solidFill>
                   <a:srgbClr val="00CC00"/>
                 </a:solidFill>
-                <a:latin typeface="Liberation Sans" pitchFamily="34"/>
-                <a:ea typeface="Noto Sans CJK SC Regular" pitchFamily="2"/>
-                <a:cs typeface="Liberation Sans" pitchFamily="34"/>
+                <a:latin typeface="Times New Roman" panose="02020603050405020304" pitchFamily="18" charset="0"/>
+                <a:ea typeface="Noto Sans CJK SC Regular" pitchFamily="2"/>
+                <a:cs typeface="Times New Roman" panose="02020603050405020304" pitchFamily="18" charset="0"/>
               </a:rPr>
               <a:t>k*C/n</a:t>
             </a:r>
@@ -29871,11 +29913,25 @@
                 <a:solidFill>
                   <a:srgbClr val="00CC00"/>
                 </a:solidFill>
-                <a:latin typeface="Liberation Sans" pitchFamily="34"/>
-                <a:ea typeface="Noto Sans CJK SC Regular" pitchFamily="2"/>
-                <a:cs typeface="Liberation Sans" pitchFamily="34"/>
-              </a:rPr>
-              <a:t> .</a:t>
+                <a:latin typeface="Times New Roman" panose="02020603050405020304" pitchFamily="18" charset="0"/>
+                <a:ea typeface="Noto Sans CJK SC Regular" pitchFamily="2"/>
+                <a:cs typeface="Times New Roman" panose="02020603050405020304" pitchFamily="18" charset="0"/>
+              </a:rPr>
+              <a:t> </a:t>
+            </a:r>
+            <a:r>
+              <a:rPr lang="he-IL" sz="4000" b="1" i="0" u="none" strike="noStrike" kern="1200" cap="none">
+                <a:ln>
+                  <a:noFill/>
+                </a:ln>
+                <a:solidFill>
+                  <a:srgbClr val="00CC00"/>
+                </a:solidFill>
+                <a:latin typeface="Liberation Sans" pitchFamily="34"/>
+                <a:ea typeface="Noto Sans CJK SC Regular" pitchFamily="2"/>
+                <a:cs typeface="Liberation Sans" pitchFamily="34"/>
+              </a:rPr>
+              <a:t>.</a:t>
             </a:r>
             <a:endParaRPr lang="en-US" sz="4000" b="1" i="0" u="none" strike="noStrike" kern="1200" cap="none">
               <a:ln>
@@ -30398,9 +30454,9 @@
                 <a:ln>
                   <a:noFill/>
                 </a:ln>
-                <a:latin typeface="Liberation Sans" pitchFamily="34"/>
-                <a:ea typeface="Noto Sans CJK SC Regular" pitchFamily="2"/>
-                <a:cs typeface="Liberation Sans" pitchFamily="34"/>
+                <a:latin typeface="Times New Roman" panose="02020603050405020304" pitchFamily="18" charset="0"/>
+                <a:ea typeface="Noto Sans CJK SC Regular" pitchFamily="2"/>
+                <a:cs typeface="Times New Roman" panose="02020603050405020304" pitchFamily="18" charset="0"/>
               </a:rPr>
               <a:t>C/n</a:t>
             </a:r>
@@ -30552,7 +30608,18 @@
                 <a:ea typeface="David CLM" pitchFamily="2"/>
                 <a:cs typeface="Liberation Sans" pitchFamily="34"/>
               </a:rPr>
-              <a:t>לכל קבוצה בגודל k</a:t>
+              <a:t>לכל קבוצה בגודל </a:t>
+            </a:r>
+            <a:r>
+              <a:rPr lang="en-US" sz="4000" b="0" i="0" u="none" strike="noStrike" kern="1200" cap="none">
+                <a:ln>
+                  <a:noFill/>
+                </a:ln>
+                <a:latin typeface="Times New Roman" panose="02020603050405020304" pitchFamily="18" charset="0"/>
+                <a:ea typeface="David CLM" pitchFamily="2"/>
+                <a:cs typeface="Times New Roman" panose="02020603050405020304" pitchFamily="18" charset="0"/>
+              </a:rPr>
+              <a:t>k</a:t>
             </a:r>
             <a:r>
               <a:rPr lang="he-IL" sz="4000" b="0" i="0" u="none" strike="noStrike" kern="1200" cap="none">
@@ -30574,7 +30641,18 @@
                 <a:ea typeface="David CLM" pitchFamily="2"/>
                 <a:cs typeface="Liberation Sans" pitchFamily="34"/>
               </a:rPr>
-              <a:t>סכום הכסף הניתן לחברי-הקבוצה הוא k*C/n</a:t>
+              <a:t>סכום הכסף הניתן לחברי-הקבוצה הוא </a:t>
+            </a:r>
+            <a:r>
+              <a:rPr lang="en-US" sz="4000" b="0" i="0" u="none" strike="noStrike" kern="1200" cap="none">
+                <a:ln>
+                  <a:noFill/>
+                </a:ln>
+                <a:latin typeface="Times New Roman" panose="02020603050405020304" pitchFamily="18" charset="0"/>
+                <a:ea typeface="David CLM" pitchFamily="2"/>
+                <a:cs typeface="Times New Roman" panose="02020603050405020304" pitchFamily="18" charset="0"/>
+              </a:rPr>
+              <a:t>k*C/n</a:t>
             </a:r>
             <a:r>
               <a:rPr lang="he-IL" sz="4000" b="0" i="0" u="none" strike="noStrike" kern="1200" cap="none">
@@ -32618,16 +32696,27 @@
                 <a:ea typeface="Noto Sans CJK SC Regular" pitchFamily="2"/>
                 <a:cs typeface="Liberation Sans" pitchFamily="34"/>
               </a:rPr>
-              <a:t> תקציב d</a:t>
+              <a:t> תקציב </a:t>
+            </a:r>
+            <a:r>
+              <a:rPr lang="en-US" sz="4000" b="0" i="0" u="none" strike="noStrike" kern="1200" cap="none">
+                <a:ln>
+                  <a:noFill/>
+                </a:ln>
+                <a:latin typeface="Times New Roman" panose="02020603050405020304" pitchFamily="18" charset="0"/>
+                <a:ea typeface="Noto Sans CJK SC Regular" pitchFamily="2"/>
+                <a:cs typeface="Times New Roman" panose="02020603050405020304" pitchFamily="18" charset="0"/>
+              </a:rPr>
+              <a:t>d</a:t>
             </a:r>
             <a:r>
               <a:rPr lang="en-US" sz="4000" b="0" i="0" u="none" strike="noStrike" kern="1200" cap="none" baseline="-33000">
                 <a:ln>
                   <a:noFill/>
                 </a:ln>
-                <a:latin typeface="Liberation Sans" pitchFamily="34"/>
-                <a:ea typeface="Noto Sans CJK SC Regular" pitchFamily="2"/>
-                <a:cs typeface="Liberation Sans" pitchFamily="34"/>
+                <a:latin typeface="Times New Roman" panose="02020603050405020304" pitchFamily="18" charset="0"/>
+                <a:ea typeface="Noto Sans CJK SC Regular" pitchFamily="2"/>
+                <a:cs typeface="Times New Roman" panose="02020603050405020304" pitchFamily="18" charset="0"/>
               </a:rPr>
               <a:t>1</a:t>
             </a:r>
@@ -32636,9 +32725,9 @@
                 <a:ln>
                   <a:noFill/>
                 </a:ln>
-                <a:latin typeface="Liberation Sans" pitchFamily="34"/>
-                <a:ea typeface="Noto Sans CJK SC Regular" pitchFamily="2"/>
-                <a:cs typeface="Liberation Sans" pitchFamily="34"/>
+                <a:latin typeface="Times New Roman" panose="02020603050405020304" pitchFamily="18" charset="0"/>
+                <a:ea typeface="Noto Sans CJK SC Regular" pitchFamily="2"/>
+                <a:cs typeface="Times New Roman" panose="02020603050405020304" pitchFamily="18" charset="0"/>
               </a:rPr>
               <a:t>,…,d</a:t>
             </a:r>
@@ -32647,9 +32736,9 @@
                 <a:ln>
                   <a:noFill/>
                 </a:ln>
-                <a:latin typeface="Liberation Sans" pitchFamily="34"/>
-                <a:ea typeface="Noto Sans CJK SC Regular" pitchFamily="2"/>
-                <a:cs typeface="Liberation Sans" pitchFamily="34"/>
+                <a:latin typeface="Times New Roman" panose="02020603050405020304" pitchFamily="18" charset="0"/>
+                <a:ea typeface="Noto Sans CJK SC Regular" pitchFamily="2"/>
+                <a:cs typeface="Times New Roman" panose="02020603050405020304" pitchFamily="18" charset="0"/>
               </a:rPr>
               <a:t>m</a:t>
             </a:r>
@@ -32658,9 +32747,9 @@
                 <a:ln>
                   <a:noFill/>
                 </a:ln>
-                <a:latin typeface="Liberation Sans" pitchFamily="34"/>
-                <a:ea typeface="Noto Sans CJK SC Regular" pitchFamily="2"/>
-                <a:cs typeface="Liberation Sans" pitchFamily="34"/>
+                <a:latin typeface="Times New Roman" panose="02020603050405020304" pitchFamily="18" charset="0"/>
+                <a:ea typeface="Noto Sans CJK SC Regular" pitchFamily="2"/>
+                <a:cs typeface="Times New Roman" panose="02020603050405020304" pitchFamily="18" charset="0"/>
               </a:rPr>
               <a:t> </a:t>
             </a:r>
@@ -32669,9 +32758,9 @@
                 <a:ln>
                   <a:noFill/>
                 </a:ln>
-                <a:latin typeface="Liberation Sans" pitchFamily="34"/>
-                <a:ea typeface="Noto Sans CJK SC Regular" pitchFamily="2"/>
-                <a:cs typeface="Liberation Sans" pitchFamily="34"/>
+                <a:latin typeface="Times New Roman" panose="02020603050405020304" pitchFamily="18" charset="0"/>
+                <a:ea typeface="Noto Sans CJK SC Regular" pitchFamily="2"/>
+                <a:cs typeface="Times New Roman" panose="02020603050405020304" pitchFamily="18" charset="0"/>
               </a:rPr>
               <a:t> </a:t>
             </a:r>
@@ -32717,18 +32806,40 @@
                 <a:ea typeface="Noto Sans CJK SC Regular" pitchFamily="2"/>
                 <a:cs typeface="Liberation Sans" pitchFamily="34"/>
               </a:rPr>
-              <a:t> אם קיימים סכומיםd</a:t>
+              <a:t> אם קיימים סכומים</a:t>
+            </a:r>
+            <a:r>
+              <a:rPr lang="en-US" sz="4000" b="0" i="0" u="none" strike="noStrike" kern="1200" cap="none">
+                <a:ln>
+                  <a:noFill/>
+                </a:ln>
+                <a:latin typeface="Times New Roman" panose="02020603050405020304" pitchFamily="18" charset="0"/>
+                <a:ea typeface="Noto Sans CJK SC Regular" pitchFamily="2"/>
+                <a:cs typeface="Times New Roman" panose="02020603050405020304" pitchFamily="18" charset="0"/>
+              </a:rPr>
+              <a:t>d</a:t>
             </a:r>
             <a:r>
               <a:rPr lang="en-US" sz="4000" b="0" i="0" u="none" strike="noStrike" kern="1200" cap="none" baseline="-33000">
                 <a:ln>
                   <a:noFill/>
                 </a:ln>
-                <a:latin typeface="Liberation Sans" pitchFamily="34"/>
-                <a:ea typeface="Noto Sans CJK SC Regular" pitchFamily="2"/>
-                <a:cs typeface="Liberation Sans" pitchFamily="34"/>
-              </a:rPr>
-              <a:t>i,j </a:t>
+                <a:latin typeface="Times New Roman" panose="02020603050405020304" pitchFamily="18" charset="0"/>
+                <a:ea typeface="Noto Sans CJK SC Regular" pitchFamily="2"/>
+                <a:cs typeface="Times New Roman" panose="02020603050405020304" pitchFamily="18" charset="0"/>
+              </a:rPr>
+              <a:t>i,j</a:t>
+            </a:r>
+            <a:r>
+              <a:rPr lang="en-US" sz="4000" b="0" i="0" u="none" strike="noStrike" kern="1200" cap="none" baseline="-33000">
+                <a:ln>
+                  <a:noFill/>
+                </a:ln>
+                <a:latin typeface="Liberation Sans" pitchFamily="34"/>
+                <a:ea typeface="Noto Sans CJK SC Regular" pitchFamily="2"/>
+                <a:cs typeface="Liberation Sans" pitchFamily="34"/>
+              </a:rPr>
+              <a:t> </a:t>
             </a:r>
             <a:r>
               <a:rPr lang="he-IL" sz="4000" b="0" i="0" u="none" strike="noStrike" kern="1200" cap="none" baseline="-33000">
@@ -32832,11 +32943,11 @@
                 <a:solidFill>
                   <a:srgbClr val="00CC00"/>
                 </a:solidFill>
-                <a:latin typeface="Liberation Sans" pitchFamily="34"/>
+                <a:latin typeface="Times New Roman" panose="02020603050405020304" pitchFamily="18" charset="0"/>
                 <a:ea typeface="David CLM" pitchFamily="2"/>
-                <a:cs typeface="Liberation Sans" pitchFamily="34"/>
-              </a:rPr>
-              <a:t>Sum[i] d</a:t>
+                <a:cs typeface="Times New Roman" panose="02020603050405020304" pitchFamily="18" charset="0"/>
+              </a:rPr>
+              <a:t>Sum[ i ] d</a:t>
             </a:r>
             <a:r>
               <a:rPr lang="en-US" sz="4000" b="0" i="0" u="none" strike="noStrike" kern="1200" cap="none" baseline="-7000">
@@ -32846,9 +32957,9 @@
                 <a:solidFill>
                   <a:srgbClr val="00CC00"/>
                 </a:solidFill>
-                <a:latin typeface="Liberation Sans" pitchFamily="34"/>
+                <a:latin typeface="Times New Roman" panose="02020603050405020304" pitchFamily="18" charset="0"/>
                 <a:ea typeface="David CLM" pitchFamily="2"/>
-                <a:cs typeface="Liberation Sans" pitchFamily="34"/>
+                <a:cs typeface="Times New Roman" panose="02020603050405020304" pitchFamily="18" charset="0"/>
               </a:rPr>
               <a:t>i,j</a:t>
             </a:r>
@@ -32860,9 +32971,9 @@
                 <a:solidFill>
                   <a:srgbClr val="00CC00"/>
                 </a:solidFill>
-                <a:latin typeface="Liberation Sans" pitchFamily="34"/>
+                <a:latin typeface="Times New Roman" panose="02020603050405020304" pitchFamily="18" charset="0"/>
                 <a:ea typeface="David CLM" pitchFamily="2"/>
-                <a:cs typeface="Liberation Sans" pitchFamily="34"/>
+                <a:cs typeface="Times New Roman" panose="02020603050405020304" pitchFamily="18" charset="0"/>
               </a:rPr>
               <a:t> = d</a:t>
             </a:r>
@@ -32874,9 +32985,9 @@
                 <a:solidFill>
                   <a:srgbClr val="00CC00"/>
                 </a:solidFill>
-                <a:latin typeface="Liberation Sans" pitchFamily="34"/>
+                <a:latin typeface="Times New Roman" panose="02020603050405020304" pitchFamily="18" charset="0"/>
                 <a:ea typeface="David CLM" pitchFamily="2"/>
-                <a:cs typeface="Liberation Sans" pitchFamily="34"/>
+                <a:cs typeface="Times New Roman" panose="02020603050405020304" pitchFamily="18" charset="0"/>
               </a:rPr>
               <a:t>j                 </a:t>
             </a:r>
@@ -32947,11 +33058,11 @@
                 <a:solidFill>
                   <a:srgbClr val="0066FF"/>
                 </a:solidFill>
-                <a:latin typeface="Liberation Sans" pitchFamily="34"/>
+                <a:latin typeface="Times New Roman" panose="02020603050405020304" pitchFamily="18" charset="0"/>
                 <a:ea typeface="David CLM" pitchFamily="2"/>
-                <a:cs typeface="Liberation Sans" pitchFamily="34"/>
-              </a:rPr>
-              <a:t>Sum[j] d</a:t>
+                <a:cs typeface="Times New Roman" panose="02020603050405020304" pitchFamily="18" charset="0"/>
+              </a:rPr>
+              <a:t>Sum[ j ] d</a:t>
             </a:r>
             <a:r>
               <a:rPr lang="en-US" sz="4000" b="0" i="0" u="none" strike="noStrike" kern="1200" cap="none" baseline="-7000">
@@ -32961,9 +33072,9 @@
                 <a:solidFill>
                   <a:srgbClr val="0066FF"/>
                 </a:solidFill>
-                <a:latin typeface="Liberation Sans" pitchFamily="34"/>
+                <a:latin typeface="Times New Roman" panose="02020603050405020304" pitchFamily="18" charset="0"/>
                 <a:ea typeface="David CLM" pitchFamily="2"/>
-                <a:cs typeface="Liberation Sans" pitchFamily="34"/>
+                <a:cs typeface="Times New Roman" panose="02020603050405020304" pitchFamily="18" charset="0"/>
               </a:rPr>
               <a:t>i,j</a:t>
             </a:r>
@@ -32975,11 +33086,25 @@
                 <a:solidFill>
                   <a:srgbClr val="0066FF"/>
                 </a:solidFill>
-                <a:latin typeface="Liberation Sans" pitchFamily="34"/>
+                <a:latin typeface="Times New Roman" panose="02020603050405020304" pitchFamily="18" charset="0"/>
                 <a:ea typeface="David CLM" pitchFamily="2"/>
-                <a:cs typeface="Liberation Sans" pitchFamily="34"/>
-              </a:rPr>
-              <a:t> = C/n      – </a:t>
+                <a:cs typeface="Times New Roman" panose="02020603050405020304" pitchFamily="18" charset="0"/>
+              </a:rPr>
+              <a:t> = C/n      </a:t>
+            </a:r>
+            <a:r>
+              <a:rPr lang="en-US" sz="4000" b="0" i="0" u="none" strike="noStrike" kern="1200" cap="none" baseline="0">
+                <a:ln>
+                  <a:noFill/>
+                </a:ln>
+                <a:solidFill>
+                  <a:srgbClr val="0066FF"/>
+                </a:solidFill>
+                <a:latin typeface="Liberation Sans" pitchFamily="34"/>
+                <a:ea typeface="David CLM" pitchFamily="2"/>
+                <a:cs typeface="Liberation Sans" pitchFamily="34"/>
+              </a:rPr>
+              <a:t>– </a:t>
             </a:r>
             <a:r>
               <a:rPr lang="he-IL" sz="4000" b="0" i="0" u="none" strike="noStrike" kern="1200" cap="none" baseline="0">
@@ -33034,9 +33159,9 @@
                 <a:solidFill>
                   <a:srgbClr val="00FFFF"/>
                 </a:solidFill>
-                <a:latin typeface="Liberation Sans" pitchFamily="34"/>
+                <a:latin typeface="Times New Roman" panose="02020603050405020304" pitchFamily="18" charset="0"/>
                 <a:ea typeface="David CLM" pitchFamily="2"/>
-                <a:cs typeface="Liberation Sans" pitchFamily="34"/>
+                <a:cs typeface="Times New Roman" panose="02020603050405020304" pitchFamily="18" charset="0"/>
               </a:rPr>
               <a:t>d</a:t>
             </a:r>
@@ -33048,9 +33173,9 @@
                 <a:solidFill>
                   <a:srgbClr val="00FFFF"/>
                 </a:solidFill>
-                <a:latin typeface="Liberation Sans" pitchFamily="34"/>
+                <a:latin typeface="Times New Roman" panose="02020603050405020304" pitchFamily="18" charset="0"/>
                 <a:ea typeface="David CLM" pitchFamily="2"/>
-                <a:cs typeface="Liberation Sans" pitchFamily="34"/>
+                <a:cs typeface="Times New Roman" panose="02020603050405020304" pitchFamily="18" charset="0"/>
               </a:rPr>
               <a:t>i,j</a:t>
             </a:r>
@@ -33062,11 +33187,39 @@
                 <a:solidFill>
                   <a:srgbClr val="00FFFF"/>
                 </a:solidFill>
-                <a:latin typeface="Liberation Sans" pitchFamily="34"/>
+                <a:latin typeface="Times New Roman" panose="02020603050405020304" pitchFamily="18" charset="0"/>
                 <a:ea typeface="David CLM" pitchFamily="2"/>
-                <a:cs typeface="Liberation Sans" pitchFamily="34"/>
-              </a:rPr>
-              <a:t> &gt; 0   only if   u</a:t>
+                <a:cs typeface="Times New Roman" panose="02020603050405020304" pitchFamily="18" charset="0"/>
+              </a:rPr>
+              <a:t> &gt; 0   </a:t>
+            </a:r>
+            <a:r>
+              <a:rPr lang="en-US" sz="4000" b="0" i="0" u="none" strike="noStrike" kern="1200" cap="none" baseline="0">
+                <a:ln>
+                  <a:noFill/>
+                </a:ln>
+                <a:solidFill>
+                  <a:srgbClr val="00FFFF"/>
+                </a:solidFill>
+                <a:latin typeface="Liberation Sans" pitchFamily="34"/>
+                <a:ea typeface="David CLM" pitchFamily="2"/>
+                <a:cs typeface="Liberation Sans" pitchFamily="34"/>
+              </a:rPr>
+              <a:t>only if   </a:t>
+            </a:r>
+            <a:r>
+              <a:rPr lang="en-US" sz="4000" b="0" i="0" u="none" strike="noStrike" kern="1200" cap="none" baseline="0">
+                <a:ln>
+                  <a:noFill/>
+                </a:ln>
+                <a:solidFill>
+                  <a:srgbClr val="00FFFF"/>
+                </a:solidFill>
+                <a:latin typeface="Times New Roman" panose="02020603050405020304" pitchFamily="18" charset="0"/>
+                <a:ea typeface="David CLM" pitchFamily="2"/>
+                <a:cs typeface="Times New Roman" panose="02020603050405020304" pitchFamily="18" charset="0"/>
+              </a:rPr>
+              <a:t>u</a:t>
             </a:r>
             <a:r>
               <a:rPr lang="en-US" sz="4000" b="0" i="0" u="none" strike="noStrike" kern="1200" cap="none" baseline="-33000">
@@ -33076,9 +33229,9 @@
                 <a:solidFill>
                   <a:srgbClr val="00FFFF"/>
                 </a:solidFill>
-                <a:latin typeface="Liberation Sans" pitchFamily="34"/>
+                <a:latin typeface="Times New Roman" panose="02020603050405020304" pitchFamily="18" charset="0"/>
                 <a:ea typeface="David CLM" pitchFamily="2"/>
-                <a:cs typeface="Liberation Sans" pitchFamily="34"/>
+                <a:cs typeface="Times New Roman" panose="02020603050405020304" pitchFamily="18" charset="0"/>
               </a:rPr>
               <a:t>i,j</a:t>
             </a:r>
@@ -33090,11 +33243,25 @@
                 <a:solidFill>
                   <a:srgbClr val="00FFFF"/>
                 </a:solidFill>
-                <a:latin typeface="Liberation Sans" pitchFamily="34"/>
+                <a:latin typeface="Times New Roman" panose="02020603050405020304" pitchFamily="18" charset="0"/>
                 <a:ea typeface="David CLM" pitchFamily="2"/>
-                <a:cs typeface="Liberation Sans" pitchFamily="34"/>
-              </a:rPr>
-              <a:t> &gt; 0.</a:t>
+                <a:cs typeface="Times New Roman" panose="02020603050405020304" pitchFamily="18" charset="0"/>
+              </a:rPr>
+              <a:t> &gt; 0</a:t>
+            </a:r>
+            <a:r>
+              <a:rPr lang="en-US" sz="4000" b="0" i="0" u="none" strike="noStrike" kern="1200" cap="none" baseline="0">
+                <a:ln>
+                  <a:noFill/>
+                </a:ln>
+                <a:solidFill>
+                  <a:srgbClr val="00FFFF"/>
+                </a:solidFill>
+                <a:latin typeface="Liberation Sans" pitchFamily="34"/>
+                <a:ea typeface="David CLM" pitchFamily="2"/>
+                <a:cs typeface="Liberation Sans" pitchFamily="34"/>
+              </a:rPr>
+              <a:t>.</a:t>
             </a:r>
           </a:p>
           <a:p>
@@ -33164,7 +33331,18 @@
                 <a:ea typeface="David CLM" pitchFamily="2"/>
                 <a:cs typeface="Liberation Sans" pitchFamily="34"/>
               </a:rPr>
-              <a:t> נותנים לכל אזרח את החלק היחסי שלו בתקציב C/n</a:t>
+              <a:t> נותנים לכל אזרח את החלק היחסי שלו בתקציב </a:t>
+            </a:r>
+            <a:r>
+              <a:rPr lang="en-US" sz="4000" b="0" i="0" u="none" strike="noStrike" kern="1200" cap="none" baseline="0">
+                <a:ln>
+                  <a:noFill/>
+                </a:ln>
+                <a:latin typeface="Times New Roman" panose="02020603050405020304" pitchFamily="18" charset="0"/>
+                <a:ea typeface="David CLM" pitchFamily="2"/>
+                <a:cs typeface="Times New Roman" panose="02020603050405020304" pitchFamily="18" charset="0"/>
+              </a:rPr>
+              <a:t>C/n</a:t>
             </a:r>
             <a:r>
               <a:rPr lang="he-IL" sz="4000" b="0" i="0" u="none" strike="noStrike" kern="1200" cap="none" baseline="0">
@@ -33204,9 +33382,9 @@
                 <a:ln>
                   <a:noFill/>
                 </a:ln>
-                <a:latin typeface="Liberation Sans" pitchFamily="34"/>
+                <a:latin typeface="Times New Roman" panose="02020603050405020304" pitchFamily="18" charset="0"/>
                 <a:ea typeface="David CLM" pitchFamily="2"/>
-                <a:cs typeface="Liberation Sans" pitchFamily="34"/>
+                <a:cs typeface="Times New Roman" panose="02020603050405020304" pitchFamily="18" charset="0"/>
               </a:rPr>
               <a:t>d</a:t>
             </a:r>
@@ -33215,9 +33393,9 @@
                 <a:ln>
                   <a:noFill/>
                 </a:ln>
-                <a:latin typeface="Liberation Sans" pitchFamily="34"/>
+                <a:latin typeface="Times New Roman" panose="02020603050405020304" pitchFamily="18" charset="0"/>
                 <a:ea typeface="David CLM" pitchFamily="2"/>
-                <a:cs typeface="Liberation Sans" pitchFamily="34"/>
+                <a:cs typeface="Times New Roman" panose="02020603050405020304" pitchFamily="18" charset="0"/>
               </a:rPr>
               <a:t>i,1</a:t>
             </a:r>
@@ -33226,9 +33404,9 @@
                 <a:ln>
                   <a:noFill/>
                 </a:ln>
-                <a:latin typeface="Liberation Sans" pitchFamily="34"/>
+                <a:latin typeface="Times New Roman" panose="02020603050405020304" pitchFamily="18" charset="0"/>
                 <a:ea typeface="David CLM" pitchFamily="2"/>
-                <a:cs typeface="Liberation Sans" pitchFamily="34"/>
+                <a:cs typeface="Times New Roman" panose="02020603050405020304" pitchFamily="18" charset="0"/>
               </a:rPr>
               <a:t>,…,d</a:t>
             </a:r>
@@ -33237,9 +33415,9 @@
                 <a:ln>
                   <a:noFill/>
                 </a:ln>
-                <a:latin typeface="Liberation Sans" pitchFamily="34"/>
+                <a:latin typeface="Times New Roman" panose="02020603050405020304" pitchFamily="18" charset="0"/>
                 <a:ea typeface="David CLM" pitchFamily="2"/>
-                <a:cs typeface="Liberation Sans" pitchFamily="34"/>
+                <a:cs typeface="Times New Roman" panose="02020603050405020304" pitchFamily="18" charset="0"/>
               </a:rPr>
               <a:t>i,m</a:t>
             </a:r>
@@ -33435,14 +33613,14 @@
           <p:nvPr>
             <p:extLst>
               <p:ext uri="{D42A27DB-BD31-4B8C-83A1-F6EECF244321}">
-                <p14:modId xmlns:p14="http://schemas.microsoft.com/office/powerpoint/2010/main" val="813402922"/>
+                <p14:modId xmlns:p14="http://schemas.microsoft.com/office/powerpoint/2010/main" val="1283152827"/>
               </p:ext>
             </p:extLst>
           </p:nvPr>
         </p:nvGraphicFramePr>
         <p:xfrm>
-          <a:off x="1150636" y="1793697"/>
-          <a:ext cx="7249886" cy="3010692"/>
+          <a:off x="274323" y="1793697"/>
+          <a:ext cx="9466836" cy="3925092"/>
         </p:xfrm>
         <a:graphic>
           <a:graphicData uri="http://schemas.openxmlformats.org/drawingml/2006/table">
@@ -33451,42 +33629,42 @@
                 <a:tableStyleId>{775DCB02-9BB8-47FD-8907-85C794F793BA}</a:tableStyleId>
               </a:tblPr>
               <a:tblGrid>
-                <a:gridCol w="1069091">
+                <a:gridCol w="1396011">
                   <a:extLst>
                     <a:ext uri="{9D8B030D-6E8A-4147-A177-3AD203B41FA5}">
                       <a16:colId xmlns:a16="http://schemas.microsoft.com/office/drawing/2014/main" val="136294870"/>
                     </a:ext>
                   </a:extLst>
                 </a:gridCol>
-                <a:gridCol w="1236159">
+                <a:gridCol w="1614165">
                   <a:extLst>
                     <a:ext uri="{9D8B030D-6E8A-4147-A177-3AD203B41FA5}">
                       <a16:colId xmlns:a16="http://schemas.microsoft.com/office/drawing/2014/main" val="1045253322"/>
                     </a:ext>
                   </a:extLst>
                 </a:gridCol>
-                <a:gridCol w="1236159">
+                <a:gridCol w="1614165">
                   <a:extLst>
                     <a:ext uri="{9D8B030D-6E8A-4147-A177-3AD203B41FA5}">
                       <a16:colId xmlns:a16="http://schemas.microsoft.com/office/drawing/2014/main" val="518626333"/>
                     </a:ext>
                   </a:extLst>
                 </a:gridCol>
-                <a:gridCol w="1236159">
+                <a:gridCol w="1614165">
                   <a:extLst>
                     <a:ext uri="{9D8B030D-6E8A-4147-A177-3AD203B41FA5}">
                       <a16:colId xmlns:a16="http://schemas.microsoft.com/office/drawing/2014/main" val="1616729752"/>
                     </a:ext>
                   </a:extLst>
                 </a:gridCol>
-                <a:gridCol w="1236159">
+                <a:gridCol w="1614165">
                   <a:extLst>
                     <a:ext uri="{9D8B030D-6E8A-4147-A177-3AD203B41FA5}">
                       <a16:colId xmlns:a16="http://schemas.microsoft.com/office/drawing/2014/main" val="2401212738"/>
                     </a:ext>
                   </a:extLst>
                 </a:gridCol>
-                <a:gridCol w="1236159">
+                <a:gridCol w="1614165">
                   <a:extLst>
                     <a:ext uri="{9D8B030D-6E8A-4147-A177-3AD203B41FA5}">
                       <a16:colId xmlns:a16="http://schemas.microsoft.com/office/drawing/2014/main" val="335756025"/>
@@ -33501,7 +33679,7 @@
                     <a:lstStyle/>
                     <a:p>
                       <a:pPr algn="ctr" rtl="1"/>
-                      <a:endParaRPr lang="he-IL"/>
+                      <a:endParaRPr lang="he-IL" sz="2800"/>
                     </a:p>
                   </a:txBody>
                   <a:tcPr/>
@@ -33513,7 +33691,7 @@
                     <a:p>
                       <a:pPr algn="ctr" rtl="1"/>
                       <a:r>
-                        <a:rPr lang="he-IL"/>
+                        <a:rPr lang="he-IL" sz="2800"/>
                         <a:t>נושא 1</a:t>
                       </a:r>
                     </a:p>
@@ -33527,7 +33705,7 @@
                     <a:p>
                       <a:pPr algn="ctr" rtl="1"/>
                       <a:r>
-                        <a:rPr lang="he-IL"/>
+                        <a:rPr lang="he-IL" sz="2800"/>
                         <a:t>נושא 2</a:t>
                       </a:r>
                     </a:p>
@@ -33541,7 +33719,7 @@
                     <a:p>
                       <a:pPr algn="ctr" rtl="1"/>
                       <a:r>
-                        <a:rPr lang="he-IL"/>
+                        <a:rPr lang="he-IL" sz="2800"/>
                         <a:t>נושא 3</a:t>
                       </a:r>
                     </a:p>
@@ -33555,7 +33733,7 @@
                     <a:p>
                       <a:pPr algn="ctr" rtl="1"/>
                       <a:r>
-                        <a:rPr lang="he-IL"/>
+                        <a:rPr lang="he-IL" sz="2800"/>
                         <a:t>נושא 4</a:t>
                       </a:r>
                     </a:p>
@@ -33569,7 +33747,7 @@
                     <a:p>
                       <a:pPr algn="ctr" rtl="1"/>
                       <a:r>
-                        <a:rPr lang="he-IL"/>
+                        <a:rPr lang="he-IL" sz="2800"/>
                         <a:t>סה"כ</a:t>
                       </a:r>
                     </a:p>
@@ -33590,7 +33768,7 @@
                     <a:p>
                       <a:pPr algn="ctr" rtl="1"/>
                       <a:r>
-                        <a:rPr lang="he-IL"/>
+                        <a:rPr lang="he-IL" sz="2800"/>
                         <a:t>אזרח 1:</a:t>
                       </a:r>
                     </a:p>
@@ -33604,14 +33782,23 @@
                     <a:p>
                       <a:pPr algn="ctr" rtl="1"/>
                       <a:r>
-                        <a:rPr lang="en-US"/>
+                        <a:rPr lang="en-US" sz="2800">
+                          <a:latin typeface="Times New Roman" panose="02020603050405020304" pitchFamily="18" charset="0"/>
+                          <a:cs typeface="Times New Roman" panose="02020603050405020304" pitchFamily="18" charset="0"/>
+                        </a:rPr>
                         <a:t>d</a:t>
                       </a:r>
                       <a:r>
-                        <a:rPr lang="en-US" baseline="-25000"/>
+                        <a:rPr lang="en-US" sz="2800" baseline="-25000">
+                          <a:latin typeface="Times New Roman" panose="02020603050405020304" pitchFamily="18" charset="0"/>
+                          <a:cs typeface="Times New Roman" panose="02020603050405020304" pitchFamily="18" charset="0"/>
+                        </a:rPr>
                         <a:t>1,1</a:t>
                       </a:r>
-                      <a:endParaRPr lang="he-IL"/>
+                      <a:endParaRPr lang="he-IL" sz="2800">
+                        <a:latin typeface="Times New Roman" panose="02020603050405020304" pitchFamily="18" charset="0"/>
+                        <a:cs typeface="Times New Roman" panose="02020603050405020304" pitchFamily="18" charset="0"/>
+                      </a:endParaRPr>
                     </a:p>
                   </a:txBody>
                   <a:tcPr/>
@@ -33639,14 +33826,23 @@
                         <a:defRPr/>
                       </a:pPr>
                       <a:r>
-                        <a:rPr lang="en-US"/>
+                        <a:rPr lang="en-US" sz="2800">
+                          <a:latin typeface="Times New Roman" panose="02020603050405020304" pitchFamily="18" charset="0"/>
+                          <a:cs typeface="Times New Roman" panose="02020603050405020304" pitchFamily="18" charset="0"/>
+                        </a:rPr>
                         <a:t>d</a:t>
                       </a:r>
                       <a:r>
-                        <a:rPr lang="en-US" baseline="-25000"/>
+                        <a:rPr lang="en-US" sz="2800" baseline="-25000">
+                          <a:latin typeface="Times New Roman" panose="02020603050405020304" pitchFamily="18" charset="0"/>
+                          <a:cs typeface="Times New Roman" panose="02020603050405020304" pitchFamily="18" charset="0"/>
+                        </a:rPr>
                         <a:t>1,2</a:t>
                       </a:r>
-                      <a:endParaRPr lang="he-IL"/>
+                      <a:endParaRPr lang="he-IL" sz="2800">
+                        <a:latin typeface="Times New Roman" panose="02020603050405020304" pitchFamily="18" charset="0"/>
+                        <a:cs typeface="Times New Roman" panose="02020603050405020304" pitchFamily="18" charset="0"/>
+                      </a:endParaRPr>
                     </a:p>
                   </a:txBody>
                   <a:tcPr/>
@@ -33658,10 +33854,10 @@
                     <a:p>
                       <a:pPr algn="ctr" rtl="1"/>
                       <a:r>
-                        <a:rPr lang="en-US"/>
+                        <a:rPr lang="en-US" sz="2800"/>
                         <a:t>…</a:t>
                       </a:r>
-                      <a:endParaRPr lang="he-IL"/>
+                      <a:endParaRPr lang="he-IL" sz="2800"/>
                     </a:p>
                   </a:txBody>
                   <a:tcPr/>
@@ -33689,14 +33885,14 @@
                         <a:defRPr/>
                       </a:pPr>
                       <a:r>
-                        <a:rPr lang="en-US"/>
+                        <a:rPr lang="en-US" sz="2800"/>
                         <a:t>…</a:t>
                       </a:r>
-                      <a:endParaRPr lang="he-IL"/>
+                      <a:endParaRPr lang="he-IL" sz="2800"/>
                     </a:p>
                     <a:p>
                       <a:pPr algn="ctr" rtl="1"/>
-                      <a:endParaRPr lang="he-IL"/>
+                      <a:endParaRPr lang="he-IL" sz="2800"/>
                     </a:p>
                   </a:txBody>
                   <a:tcPr/>
@@ -33708,10 +33904,16 @@
                     <a:p>
                       <a:pPr algn="ctr" rtl="1"/>
                       <a:r>
-                        <a:rPr lang="en-US"/>
+                        <a:rPr lang="en-US" sz="2800">
+                          <a:latin typeface="Times New Roman" panose="02020603050405020304" pitchFamily="18" charset="0"/>
+                          <a:cs typeface="Times New Roman" panose="02020603050405020304" pitchFamily="18" charset="0"/>
+                        </a:rPr>
                         <a:t>C/n</a:t>
                       </a:r>
-                      <a:endParaRPr lang="he-IL"/>
+                      <a:endParaRPr lang="he-IL" sz="2800">
+                        <a:latin typeface="Times New Roman" panose="02020603050405020304" pitchFamily="18" charset="0"/>
+                        <a:cs typeface="Times New Roman" panose="02020603050405020304" pitchFamily="18" charset="0"/>
+                      </a:endParaRPr>
                     </a:p>
                   </a:txBody>
                   <a:tcPr/>
@@ -33730,7 +33932,7 @@
                     <a:p>
                       <a:pPr algn="ctr" rtl="1"/>
                       <a:r>
-                        <a:rPr lang="he-IL"/>
+                        <a:rPr lang="he-IL" sz="2800"/>
                         <a:t>אזרח 2:</a:t>
                       </a:r>
                     </a:p>
@@ -33760,14 +33962,23 @@
                         <a:defRPr/>
                       </a:pPr>
                       <a:r>
-                        <a:rPr lang="en-US"/>
+                        <a:rPr lang="en-US" sz="2800">
+                          <a:latin typeface="Times New Roman" panose="02020603050405020304" pitchFamily="18" charset="0"/>
+                          <a:cs typeface="Times New Roman" panose="02020603050405020304" pitchFamily="18" charset="0"/>
+                        </a:rPr>
                         <a:t>d</a:t>
                       </a:r>
                       <a:r>
-                        <a:rPr lang="en-US" baseline="-25000"/>
+                        <a:rPr lang="en-US" sz="2800" baseline="-25000">
+                          <a:latin typeface="Times New Roman" panose="02020603050405020304" pitchFamily="18" charset="0"/>
+                          <a:cs typeface="Times New Roman" panose="02020603050405020304" pitchFamily="18" charset="0"/>
+                        </a:rPr>
                         <a:t>2,1</a:t>
                       </a:r>
-                      <a:endParaRPr lang="he-IL"/>
+                      <a:endParaRPr lang="he-IL" sz="2800">
+                        <a:latin typeface="Times New Roman" panose="02020603050405020304" pitchFamily="18" charset="0"/>
+                        <a:cs typeface="Times New Roman" panose="02020603050405020304" pitchFamily="18" charset="0"/>
+                      </a:endParaRPr>
                     </a:p>
                   </a:txBody>
                   <a:tcPr/>
@@ -33795,14 +34006,14 @@
                         <a:defRPr/>
                       </a:pPr>
                       <a:r>
-                        <a:rPr lang="en-US"/>
+                        <a:rPr lang="en-US" sz="2800"/>
                         <a:t>…</a:t>
                       </a:r>
-                      <a:endParaRPr lang="he-IL"/>
+                      <a:endParaRPr lang="he-IL" sz="2800"/>
                     </a:p>
                     <a:p>
                       <a:pPr algn="ctr" rtl="1"/>
-                      <a:endParaRPr lang="he-IL"/>
+                      <a:endParaRPr lang="he-IL" sz="2800"/>
                     </a:p>
                   </a:txBody>
                   <a:tcPr/>
@@ -33830,14 +34041,14 @@
                         <a:defRPr/>
                       </a:pPr>
                       <a:r>
-                        <a:rPr lang="en-US"/>
+                        <a:rPr lang="en-US" sz="2800"/>
                         <a:t>…</a:t>
                       </a:r>
-                      <a:endParaRPr lang="he-IL"/>
+                      <a:endParaRPr lang="he-IL" sz="2800"/>
                     </a:p>
                     <a:p>
                       <a:pPr algn="ctr" rtl="1"/>
-                      <a:endParaRPr lang="he-IL"/>
+                      <a:endParaRPr lang="he-IL" sz="2800"/>
                     </a:p>
                   </a:txBody>
                   <a:tcPr/>
@@ -33865,14 +34076,14 @@
                         <a:defRPr/>
                       </a:pPr>
                       <a:r>
-                        <a:rPr lang="en-US"/>
+                        <a:rPr lang="en-US" sz="2800"/>
                         <a:t>…</a:t>
                       </a:r>
-                      <a:endParaRPr lang="he-IL"/>
+                      <a:endParaRPr lang="he-IL" sz="2800"/>
                     </a:p>
                     <a:p>
                       <a:pPr algn="ctr" rtl="1"/>
-                      <a:endParaRPr lang="he-IL"/>
+                      <a:endParaRPr lang="he-IL" sz="2800"/>
                     </a:p>
                   </a:txBody>
                   <a:tcPr/>
@@ -33900,10 +34111,16 @@
                         <a:defRPr/>
                       </a:pPr>
                       <a:r>
-                        <a:rPr lang="en-US"/>
+                        <a:rPr lang="en-US" sz="2800">
+                          <a:latin typeface="Times New Roman" panose="02020603050405020304" pitchFamily="18" charset="0"/>
+                          <a:cs typeface="Times New Roman" panose="02020603050405020304" pitchFamily="18" charset="0"/>
+                        </a:rPr>
                         <a:t>C/n</a:t>
                       </a:r>
-                      <a:endParaRPr lang="he-IL"/>
+                      <a:endParaRPr lang="he-IL" sz="2800">
+                        <a:latin typeface="Times New Roman" panose="02020603050405020304" pitchFamily="18" charset="0"/>
+                        <a:cs typeface="Times New Roman" panose="02020603050405020304" pitchFamily="18" charset="0"/>
+                      </a:endParaRPr>
                     </a:p>
                   </a:txBody>
                   <a:tcPr/>
@@ -33922,7 +34139,7 @@
                     <a:p>
                       <a:pPr algn="ctr" rtl="1"/>
                       <a:r>
-                        <a:rPr lang="he-IL"/>
+                        <a:rPr lang="he-IL" sz="2800"/>
                         <a:t>אזרח 3:</a:t>
                       </a:r>
                     </a:p>
@@ -33952,14 +34169,14 @@
                         <a:defRPr/>
                       </a:pPr>
                       <a:r>
-                        <a:rPr lang="en-US"/>
+                        <a:rPr lang="en-US" sz="2800"/>
                         <a:t>…</a:t>
                       </a:r>
-                      <a:endParaRPr lang="he-IL"/>
+                      <a:endParaRPr lang="he-IL" sz="2800"/>
                     </a:p>
                     <a:p>
                       <a:pPr algn="ctr" rtl="1"/>
-                      <a:endParaRPr lang="he-IL"/>
+                      <a:endParaRPr lang="he-IL" sz="2800"/>
                     </a:p>
                   </a:txBody>
                   <a:tcPr/>
@@ -33987,14 +34204,14 @@
                         <a:defRPr/>
                       </a:pPr>
                       <a:r>
-                        <a:rPr lang="en-US"/>
+                        <a:rPr lang="en-US" sz="2800"/>
                         <a:t>…</a:t>
                       </a:r>
-                      <a:endParaRPr lang="he-IL"/>
+                      <a:endParaRPr lang="he-IL" sz="2800"/>
                     </a:p>
                     <a:p>
                       <a:pPr algn="ctr" rtl="1"/>
-                      <a:endParaRPr lang="he-IL"/>
+                      <a:endParaRPr lang="he-IL" sz="2800"/>
                     </a:p>
                   </a:txBody>
                   <a:tcPr/>
@@ -34022,14 +34239,14 @@
                         <a:defRPr/>
                       </a:pPr>
                       <a:r>
-                        <a:rPr lang="en-US"/>
+                        <a:rPr lang="en-US" sz="2800"/>
                         <a:t>…</a:t>
                       </a:r>
-                      <a:endParaRPr lang="he-IL"/>
+                      <a:endParaRPr lang="he-IL" sz="2800"/>
                     </a:p>
                     <a:p>
                       <a:pPr algn="ctr" rtl="1"/>
-                      <a:endParaRPr lang="he-IL"/>
+                      <a:endParaRPr lang="he-IL" sz="2800"/>
                     </a:p>
                   </a:txBody>
                   <a:tcPr/>
@@ -34057,14 +34274,14 @@
                         <a:defRPr/>
                       </a:pPr>
                       <a:r>
-                        <a:rPr lang="en-US"/>
+                        <a:rPr lang="en-US" sz="2800"/>
                         <a:t>…</a:t>
                       </a:r>
-                      <a:endParaRPr lang="he-IL"/>
+                      <a:endParaRPr lang="he-IL" sz="2800"/>
                     </a:p>
                     <a:p>
                       <a:pPr algn="ctr" rtl="1"/>
-                      <a:endParaRPr lang="he-IL"/>
+                      <a:endParaRPr lang="he-IL" sz="2800"/>
                     </a:p>
                   </a:txBody>
                   <a:tcPr/>
@@ -34092,10 +34309,16 @@
                         <a:defRPr/>
                       </a:pPr>
                       <a:r>
-                        <a:rPr lang="en-US"/>
+                        <a:rPr lang="en-US" sz="2800">
+                          <a:latin typeface="Times New Roman" panose="02020603050405020304" pitchFamily="18" charset="0"/>
+                          <a:cs typeface="Times New Roman" panose="02020603050405020304" pitchFamily="18" charset="0"/>
+                        </a:rPr>
                         <a:t>C/n</a:t>
                       </a:r>
-                      <a:endParaRPr lang="he-IL"/>
+                      <a:endParaRPr lang="he-IL" sz="2800">
+                        <a:latin typeface="Times New Roman" panose="02020603050405020304" pitchFamily="18" charset="0"/>
+                        <a:cs typeface="Times New Roman" panose="02020603050405020304" pitchFamily="18" charset="0"/>
+                      </a:endParaRPr>
                     </a:p>
                   </a:txBody>
                   <a:tcPr/>
@@ -34114,7 +34337,7 @@
                     <a:p>
                       <a:pPr algn="ctr" rtl="1"/>
                       <a:r>
-                        <a:rPr lang="he-IL"/>
+                        <a:rPr lang="he-IL" sz="2800"/>
                         <a:t>סה"כ</a:t>
                       </a:r>
                     </a:p>
@@ -34128,14 +34351,23 @@
                     <a:p>
                       <a:pPr algn="ctr" rtl="1"/>
                       <a:r>
-                        <a:rPr lang="en-US"/>
+                        <a:rPr lang="en-US" sz="2800">
+                          <a:latin typeface="Times New Roman" panose="02020603050405020304" pitchFamily="18" charset="0"/>
+                          <a:cs typeface="Times New Roman" panose="02020603050405020304" pitchFamily="18" charset="0"/>
+                        </a:rPr>
                         <a:t>d</a:t>
                       </a:r>
                       <a:r>
-                        <a:rPr lang="en-US" baseline="-25000"/>
+                        <a:rPr lang="en-US" sz="2800" baseline="-25000">
+                          <a:latin typeface="Times New Roman" panose="02020603050405020304" pitchFamily="18" charset="0"/>
+                          <a:cs typeface="Times New Roman" panose="02020603050405020304" pitchFamily="18" charset="0"/>
+                        </a:rPr>
                         <a:t>1</a:t>
                       </a:r>
-                      <a:endParaRPr lang="he-IL" baseline="-25000"/>
+                      <a:endParaRPr lang="he-IL" sz="2800" baseline="-25000">
+                        <a:latin typeface="Times New Roman" panose="02020603050405020304" pitchFamily="18" charset="0"/>
+                        <a:cs typeface="Times New Roman" panose="02020603050405020304" pitchFamily="18" charset="0"/>
+                      </a:endParaRPr>
                     </a:p>
                   </a:txBody>
                   <a:tcPr/>
@@ -34147,14 +34379,23 @@
                     <a:p>
                       <a:pPr algn="ctr" rtl="1"/>
                       <a:r>
-                        <a:rPr lang="en-US"/>
+                        <a:rPr lang="en-US" sz="2800">
+                          <a:latin typeface="Times New Roman" panose="02020603050405020304" pitchFamily="18" charset="0"/>
+                          <a:cs typeface="Times New Roman" panose="02020603050405020304" pitchFamily="18" charset="0"/>
+                        </a:rPr>
                         <a:t>d</a:t>
                       </a:r>
                       <a:r>
-                        <a:rPr lang="en-US" baseline="-25000"/>
+                        <a:rPr lang="en-US" sz="2800" baseline="-25000">
+                          <a:latin typeface="Times New Roman" panose="02020603050405020304" pitchFamily="18" charset="0"/>
+                          <a:cs typeface="Times New Roman" panose="02020603050405020304" pitchFamily="18" charset="0"/>
+                        </a:rPr>
                         <a:t>2</a:t>
                       </a:r>
-                      <a:endParaRPr lang="he-IL" baseline="-25000"/>
+                      <a:endParaRPr lang="he-IL" sz="2800" baseline="-25000">
+                        <a:latin typeface="Times New Roman" panose="02020603050405020304" pitchFamily="18" charset="0"/>
+                        <a:cs typeface="Times New Roman" panose="02020603050405020304" pitchFamily="18" charset="0"/>
+                      </a:endParaRPr>
                     </a:p>
                   </a:txBody>
                   <a:tcPr/>
@@ -34166,14 +34407,23 @@
                     <a:p>
                       <a:pPr algn="ctr" rtl="1"/>
                       <a:r>
-                        <a:rPr lang="en-US"/>
+                        <a:rPr lang="en-US" sz="2800">
+                          <a:latin typeface="Times New Roman" panose="02020603050405020304" pitchFamily="18" charset="0"/>
+                          <a:cs typeface="Times New Roman" panose="02020603050405020304" pitchFamily="18" charset="0"/>
+                        </a:rPr>
                         <a:t>d</a:t>
                       </a:r>
                       <a:r>
-                        <a:rPr lang="en-US" baseline="-25000"/>
+                        <a:rPr lang="en-US" sz="2800" baseline="-25000">
+                          <a:latin typeface="Times New Roman" panose="02020603050405020304" pitchFamily="18" charset="0"/>
+                          <a:cs typeface="Times New Roman" panose="02020603050405020304" pitchFamily="18" charset="0"/>
+                        </a:rPr>
                         <a:t>3</a:t>
                       </a:r>
-                      <a:endParaRPr lang="he-IL" baseline="-25000"/>
+                      <a:endParaRPr lang="he-IL" sz="2800" baseline="-25000">
+                        <a:latin typeface="Times New Roman" panose="02020603050405020304" pitchFamily="18" charset="0"/>
+                        <a:cs typeface="Times New Roman" panose="02020603050405020304" pitchFamily="18" charset="0"/>
+                      </a:endParaRPr>
                     </a:p>
                   </a:txBody>
                   <a:tcPr/>
@@ -34185,14 +34435,23 @@
                     <a:p>
                       <a:pPr algn="ctr" rtl="1"/>
                       <a:r>
-                        <a:rPr lang="en-US"/>
+                        <a:rPr lang="en-US" sz="2800">
+                          <a:latin typeface="Times New Roman" panose="02020603050405020304" pitchFamily="18" charset="0"/>
+                          <a:cs typeface="Times New Roman" panose="02020603050405020304" pitchFamily="18" charset="0"/>
+                        </a:rPr>
                         <a:t>d</a:t>
                       </a:r>
                       <a:r>
-                        <a:rPr lang="en-US" baseline="-25000"/>
+                        <a:rPr lang="en-US" sz="2800" baseline="-25000">
+                          <a:latin typeface="Times New Roman" panose="02020603050405020304" pitchFamily="18" charset="0"/>
+                          <a:cs typeface="Times New Roman" panose="02020603050405020304" pitchFamily="18" charset="0"/>
+                        </a:rPr>
                         <a:t>4</a:t>
                       </a:r>
-                      <a:endParaRPr lang="he-IL" baseline="-25000"/>
+                      <a:endParaRPr lang="he-IL" sz="2800" baseline="-25000">
+                        <a:latin typeface="Times New Roman" panose="02020603050405020304" pitchFamily="18" charset="0"/>
+                        <a:cs typeface="Times New Roman" panose="02020603050405020304" pitchFamily="18" charset="0"/>
+                      </a:endParaRPr>
                     </a:p>
                   </a:txBody>
                   <a:tcPr/>
@@ -34204,10 +34463,16 @@
                     <a:p>
                       <a:pPr algn="ctr" rtl="1"/>
                       <a:r>
-                        <a:rPr lang="en-US"/>
+                        <a:rPr lang="en-US" sz="2800">
+                          <a:latin typeface="Times New Roman" panose="02020603050405020304" pitchFamily="18" charset="0"/>
+                          <a:cs typeface="Times New Roman" panose="02020603050405020304" pitchFamily="18" charset="0"/>
+                        </a:rPr>
                         <a:t>C</a:t>
                       </a:r>
-                      <a:endParaRPr lang="he-IL"/>
+                      <a:endParaRPr lang="he-IL" sz="2800">
+                        <a:latin typeface="Times New Roman" panose="02020603050405020304" pitchFamily="18" charset="0"/>
+                        <a:cs typeface="Times New Roman" panose="02020603050405020304" pitchFamily="18" charset="0"/>
+                      </a:endParaRPr>
                     </a:p>
                   </a:txBody>
                   <a:tcPr/>
@@ -34545,9 +34810,9 @@
                 <a:solidFill>
                   <a:srgbClr val="0066FF"/>
                 </a:solidFill>
-                <a:latin typeface="Liberation Sans" pitchFamily="34"/>
+                <a:latin typeface="Times New Roman" panose="02020603050405020304" pitchFamily="18" charset="0"/>
                 <a:ea typeface="David CLM" pitchFamily="2"/>
-                <a:cs typeface="Liberation Sans" pitchFamily="34"/>
+                <a:cs typeface="Times New Roman" panose="02020603050405020304" pitchFamily="18" charset="0"/>
               </a:rPr>
               <a:t>k</a:t>
             </a:r>
@@ -34577,7 +34842,21 @@
                 <a:ea typeface="David CLM" pitchFamily="2"/>
                 <a:cs typeface="Liberation Sans" pitchFamily="34"/>
               </a:rPr>
-              <a:t>סכום הכסף הניתן לחברי-הקבוצה על-ידי הפירוק של d</a:t>
+              <a:t>סכום הכסף הניתן לחברי-הקבוצה על-ידי הפירוק של </a:t>
+            </a:r>
+            <a:r>
+              <a:rPr lang="en-US" sz="4000" b="0" i="0" u="none" strike="noStrike" kern="1200" cap="none">
+                <a:ln>
+                  <a:noFill/>
+                </a:ln>
+                <a:solidFill>
+                  <a:srgbClr val="0066FF"/>
+                </a:solidFill>
+                <a:latin typeface="Times New Roman" panose="02020603050405020304" pitchFamily="18" charset="0"/>
+                <a:ea typeface="David CLM" pitchFamily="2"/>
+                <a:cs typeface="Times New Roman" panose="02020603050405020304" pitchFamily="18" charset="0"/>
+              </a:rPr>
+              <a:t>d</a:t>
             </a:r>
             <a:r>
               <a:rPr lang="he-IL" sz="4000" b="0" i="0" u="none" strike="noStrike" kern="1200" cap="none">
@@ -34605,7 +34884,21 @@
                 <a:ea typeface="David CLM" pitchFamily="2"/>
                 <a:cs typeface="Liberation Sans" pitchFamily="34"/>
               </a:rPr>
-              <a:t>הוא k*C/n</a:t>
+              <a:t>הוא </a:t>
+            </a:r>
+            <a:r>
+              <a:rPr lang="en-US" sz="4000" b="0" i="0" u="none" strike="noStrike" kern="1200" cap="none">
+                <a:ln>
+                  <a:noFill/>
+                </a:ln>
+                <a:solidFill>
+                  <a:srgbClr val="0066FF"/>
+                </a:solidFill>
+                <a:latin typeface="Times New Roman" panose="02020603050405020304" pitchFamily="18" charset="0"/>
+                <a:ea typeface="David CLM" pitchFamily="2"/>
+                <a:cs typeface="Times New Roman" panose="02020603050405020304" pitchFamily="18" charset="0"/>
+              </a:rPr>
+              <a:t>k*C/n</a:t>
             </a:r>
             <a:r>
               <a:rPr lang="he-IL" sz="4000" b="0" i="0" u="none" strike="noStrike" kern="1200" cap="none">
